--- a/tradely.pptx
+++ b/tradely.pptx
@@ -112,6 +112,11 @@
       </a:defRPr>
     </a:lvl9pPr>
   </p:defaultTextStyle>
+  <p:extLst>
+    <p:ext uri="{EFAFB233-063F-42B5-8137-9DF3F51BA10A}">
+      <p15:sldGuideLst xmlns:p15="http://schemas.microsoft.com/office/powerpoint/2012/main"/>
+    </p:ext>
+  </p:extLst>
 </p:presentation>
 </file>
 
@@ -4403,7 +4408,7 @@
                 </a:solidFill>
                 <a:latin typeface="system-ui"/>
               </a:rPr>
-              <a:t>Zsetonos rendszer, megkönnyíti a vásárlást</a:t>
+              <a:t>Zsetonos rendszer, megkönnyíti a vásárlást.</a:t>
             </a:r>
           </a:p>
         </p:txBody>
@@ -4443,7 +4448,7 @@
                 </a:solidFill>
                 <a:latin typeface="system-ui"/>
               </a:rPr>
-              <a:t>A rendelkezésre álló zsetonokból tud a vásárló költeni</a:t>
+              <a:t>A rendelkezésre álló zsetonokból tud a vásárló költeni.</a:t>
             </a:r>
           </a:p>
         </p:txBody>
@@ -4483,7 +4488,7 @@
                 </a:solidFill>
                 <a:latin typeface="system-ui"/>
               </a:rPr>
-              <a:t>Zsetonokat feltölteni, illetve az eladott termékek árából lehet szerezni.</a:t>
+              <a:t>Zsetonokat feltöltéssel, illetve az eladott termékek árából lehet szerezni.</a:t>
             </a:r>
           </a:p>
         </p:txBody>
@@ -4777,7 +4782,7 @@
                 </a:solidFill>
                 <a:latin typeface="system-ui"/>
               </a:rPr>
-              <a:t>A menü középső ikonjára kattintva tudjuk feltölteni az eladni kívánt terméket</a:t>
+              <a:t>A menü középső ikonjára kattintva tudjuk feltölteni az eladni kívánt terméket.</a:t>
             </a:r>
           </a:p>
         </p:txBody>
@@ -4962,6 +4967,191 @@
           </a:prstGeom>
         </p:spPr>
       </p:pic>
+      <p:sp>
+        <p:nvSpPr>
+          <p:cNvPr id="4" name="Téglalap 3">
+            <a:extLst>
+              <a:ext uri="{FF2B5EF4-FFF2-40B4-BE49-F238E27FC236}">
+                <a16:creationId xmlns:a16="http://schemas.microsoft.com/office/drawing/2014/main" id="{E96C047D-3CA9-AD97-30DD-DC53D6065607}"/>
+              </a:ext>
+            </a:extLst>
+          </p:cNvPr>
+          <p:cNvSpPr/>
+          <p:nvPr/>
+        </p:nvSpPr>
+        <p:spPr>
+          <a:xfrm rot="5400000">
+            <a:off x="-1205916" y="1205916"/>
+            <a:ext cx="6858000" cy="4446168"/>
+          </a:xfrm>
+          <a:prstGeom prst="rect">
+            <a:avLst/>
+          </a:prstGeom>
+          <a:gradFill flip="none" rotWithShape="1">
+            <a:gsLst>
+              <a:gs pos="0">
+                <a:schemeClr val="accent6">
+                  <a:lumMod val="67000"/>
+                </a:schemeClr>
+              </a:gs>
+              <a:gs pos="48000">
+                <a:schemeClr val="accent6">
+                  <a:lumMod val="97000"/>
+                  <a:lumOff val="3000"/>
+                </a:schemeClr>
+              </a:gs>
+              <a:gs pos="100000">
+                <a:schemeClr val="accent6">
+                  <a:lumMod val="60000"/>
+                  <a:lumOff val="40000"/>
+                </a:schemeClr>
+              </a:gs>
+            </a:gsLst>
+            <a:lin ang="16200000" scaled="1"/>
+            <a:tileRect/>
+          </a:gradFill>
+          <a:ln>
+            <a:noFill/>
+          </a:ln>
+        </p:spPr>
+        <p:style>
+          <a:lnRef idx="0">
+            <a:scrgbClr r="0" g="0" b="0"/>
+          </a:lnRef>
+          <a:fillRef idx="0">
+            <a:scrgbClr r="0" g="0" b="0"/>
+          </a:fillRef>
+          <a:effectRef idx="0">
+            <a:scrgbClr r="0" g="0" b="0"/>
+          </a:effectRef>
+          <a:fontRef idx="minor">
+            <a:schemeClr val="lt1"/>
+          </a:fontRef>
+        </p:style>
+        <p:txBody>
+          <a:bodyPr rtlCol="0" anchor="ctr"/>
+          <a:lstStyle/>
+          <a:p>
+            <a:pPr algn="ctr"/>
+            <a:endParaRPr lang="hu-HU"/>
+          </a:p>
+        </p:txBody>
+      </p:sp>
+      <p:sp>
+        <p:nvSpPr>
+          <p:cNvPr id="6" name="Szövegdoboz 5">
+            <a:extLst>
+              <a:ext uri="{FF2B5EF4-FFF2-40B4-BE49-F238E27FC236}">
+                <a16:creationId xmlns:a16="http://schemas.microsoft.com/office/drawing/2014/main" id="{3B9BE9C7-AE59-99C2-2E6E-9F4F92BA1495}"/>
+              </a:ext>
+            </a:extLst>
+          </p:cNvPr>
+          <p:cNvSpPr txBox="1"/>
+          <p:nvPr/>
+        </p:nvSpPr>
+        <p:spPr>
+          <a:xfrm>
+            <a:off x="163587" y="797510"/>
+            <a:ext cx="4118994" cy="5262979"/>
+          </a:xfrm>
+          <a:prstGeom prst="rect">
+            <a:avLst/>
+          </a:prstGeom>
+          <a:noFill/>
+        </p:spPr>
+        <p:txBody>
+          <a:bodyPr wrap="square" rtlCol="0">
+            <a:spAutoFit/>
+          </a:bodyPr>
+          <a:lstStyle/>
+          <a:p>
+            <a:r>
+              <a:rPr lang="hu-HU" sz="2800" b="1" dirty="0">
+                <a:solidFill>
+                  <a:schemeClr val="bg1"/>
+                </a:solidFill>
+                <a:latin typeface="system-ui"/>
+              </a:rPr>
+              <a:t>A profil felület.</a:t>
+            </a:r>
+          </a:p>
+          <a:p>
+            <a:endParaRPr lang="hu-HU" sz="2800" b="1" dirty="0">
+              <a:solidFill>
+                <a:schemeClr val="bg1"/>
+              </a:solidFill>
+              <a:latin typeface="system-ui"/>
+            </a:endParaRPr>
+          </a:p>
+          <a:p>
+            <a:r>
+              <a:rPr lang="hu-HU" sz="2800" b="1" dirty="0">
+                <a:solidFill>
+                  <a:schemeClr val="bg1"/>
+                </a:solidFill>
+                <a:latin typeface="system-ui"/>
+              </a:rPr>
+              <a:t>Itt tud a felhasználó a fiókjával kapcsolatos  intézkedéseket figyelni.</a:t>
+            </a:r>
+          </a:p>
+          <a:p>
+            <a:endParaRPr lang="hu-HU" sz="2800" b="1" dirty="0">
+              <a:solidFill>
+                <a:schemeClr val="bg1"/>
+              </a:solidFill>
+              <a:latin typeface="system-ui"/>
+            </a:endParaRPr>
+          </a:p>
+          <a:p>
+            <a:r>
+              <a:rPr lang="hu-HU" sz="2800" b="1" dirty="0">
+                <a:solidFill>
+                  <a:schemeClr val="bg1"/>
+                </a:solidFill>
+                <a:latin typeface="system-ui"/>
+              </a:rPr>
+              <a:t>Tud nevet váltani vagy </a:t>
+            </a:r>
+            <a:r>
+              <a:rPr lang="hu-HU" sz="2800" b="1" dirty="0" err="1">
+                <a:solidFill>
+                  <a:schemeClr val="bg1"/>
+                </a:solidFill>
+                <a:latin typeface="system-ui"/>
+              </a:rPr>
+              <a:t>jelszavat</a:t>
+            </a:r>
+            <a:r>
+              <a:rPr lang="hu-HU" sz="2800" b="1" dirty="0">
+                <a:solidFill>
+                  <a:schemeClr val="bg1"/>
+                </a:solidFill>
+                <a:latin typeface="system-ui"/>
+              </a:rPr>
+              <a:t> váltani, ha szükségére esik.</a:t>
+            </a:r>
+          </a:p>
+          <a:p>
+            <a:endParaRPr lang="hu-HU" sz="2800" b="1" dirty="0">
+              <a:solidFill>
+                <a:schemeClr val="bg1"/>
+              </a:solidFill>
+              <a:latin typeface="system-ui"/>
+            </a:endParaRPr>
+          </a:p>
+          <a:p>
+            <a:r>
+              <a:rPr lang="hu-HU" sz="2800" b="1" dirty="0">
+                <a:solidFill>
+                  <a:schemeClr val="bg1"/>
+                </a:solidFill>
+                <a:latin typeface="system-ui"/>
+              </a:rPr>
+              <a:t>Ki tud jelentkezni ha befejezte a vásárlást.</a:t>
+            </a:r>
+          </a:p>
+        </p:txBody>
+      </p:sp>
     </p:spTree>
     <p:extLst>
       <p:ext uri="{BB962C8B-B14F-4D97-AF65-F5344CB8AC3E}">
@@ -5102,6 +5292,184 @@
           </a:prstGeom>
         </p:spPr>
       </p:pic>
+      <p:sp>
+        <p:nvSpPr>
+          <p:cNvPr id="4" name="Téglalap 3">
+            <a:extLst>
+              <a:ext uri="{FF2B5EF4-FFF2-40B4-BE49-F238E27FC236}">
+                <a16:creationId xmlns:a16="http://schemas.microsoft.com/office/drawing/2014/main" id="{6FFCED1D-1BCA-ED75-DE7D-7C26070D8CD4}"/>
+              </a:ext>
+            </a:extLst>
+          </p:cNvPr>
+          <p:cNvSpPr/>
+          <p:nvPr/>
+        </p:nvSpPr>
+        <p:spPr>
+          <a:xfrm rot="5400000">
+            <a:off x="-1205916" y="1205916"/>
+            <a:ext cx="6858000" cy="4446168"/>
+          </a:xfrm>
+          <a:prstGeom prst="rect">
+            <a:avLst/>
+          </a:prstGeom>
+          <a:gradFill flip="none" rotWithShape="1">
+            <a:gsLst>
+              <a:gs pos="0">
+                <a:schemeClr val="accent6">
+                  <a:lumMod val="67000"/>
+                </a:schemeClr>
+              </a:gs>
+              <a:gs pos="48000">
+                <a:schemeClr val="accent6">
+                  <a:lumMod val="97000"/>
+                  <a:lumOff val="3000"/>
+                </a:schemeClr>
+              </a:gs>
+              <a:gs pos="100000">
+                <a:schemeClr val="accent6">
+                  <a:lumMod val="60000"/>
+                  <a:lumOff val="40000"/>
+                </a:schemeClr>
+              </a:gs>
+            </a:gsLst>
+            <a:lin ang="16200000" scaled="1"/>
+            <a:tileRect/>
+          </a:gradFill>
+          <a:ln>
+            <a:noFill/>
+          </a:ln>
+        </p:spPr>
+        <p:style>
+          <a:lnRef idx="0">
+            <a:scrgbClr r="0" g="0" b="0"/>
+          </a:lnRef>
+          <a:fillRef idx="0">
+            <a:scrgbClr r="0" g="0" b="0"/>
+          </a:fillRef>
+          <a:effectRef idx="0">
+            <a:scrgbClr r="0" g="0" b="0"/>
+          </a:effectRef>
+          <a:fontRef idx="minor">
+            <a:schemeClr val="lt1"/>
+          </a:fontRef>
+        </p:style>
+        <p:txBody>
+          <a:bodyPr rtlCol="0" anchor="ctr"/>
+          <a:lstStyle/>
+          <a:p>
+            <a:pPr algn="ctr"/>
+            <a:endParaRPr lang="hu-HU"/>
+          </a:p>
+        </p:txBody>
+      </p:sp>
+      <p:sp>
+        <p:nvSpPr>
+          <p:cNvPr id="6" name="Szövegdoboz 5">
+            <a:extLst>
+              <a:ext uri="{FF2B5EF4-FFF2-40B4-BE49-F238E27FC236}">
+                <a16:creationId xmlns:a16="http://schemas.microsoft.com/office/drawing/2014/main" id="{F10B5774-A644-10B9-9978-B4607EFC5ADF}"/>
+              </a:ext>
+            </a:extLst>
+          </p:cNvPr>
+          <p:cNvSpPr txBox="1"/>
+          <p:nvPr/>
+        </p:nvSpPr>
+        <p:spPr>
+          <a:xfrm>
+            <a:off x="163587" y="582067"/>
+            <a:ext cx="4118994" cy="5693866"/>
+          </a:xfrm>
+          <a:prstGeom prst="rect">
+            <a:avLst/>
+          </a:prstGeom>
+          <a:noFill/>
+        </p:spPr>
+        <p:txBody>
+          <a:bodyPr wrap="square" rtlCol="0">
+            <a:spAutoFit/>
+          </a:bodyPr>
+          <a:lstStyle/>
+          <a:p>
+            <a:r>
+              <a:rPr lang="hu-HU" sz="2800" b="1" dirty="0">
+                <a:solidFill>
+                  <a:schemeClr val="bg1"/>
+                </a:solidFill>
+                <a:latin typeface="system-ui"/>
+              </a:rPr>
+              <a:t>Az eladás felület.</a:t>
+            </a:r>
+          </a:p>
+          <a:p>
+            <a:endParaRPr lang="hu-HU" sz="2800" b="1" dirty="0">
+              <a:solidFill>
+                <a:schemeClr val="bg1"/>
+              </a:solidFill>
+              <a:latin typeface="system-ui"/>
+            </a:endParaRPr>
+          </a:p>
+          <a:p>
+            <a:r>
+              <a:rPr lang="hu-HU" sz="2800" b="1" dirty="0">
+                <a:solidFill>
+                  <a:schemeClr val="bg1"/>
+                </a:solidFill>
+                <a:latin typeface="system-ui"/>
+              </a:rPr>
+              <a:t>Itt tud a felhasználó feltölteni eladásra kívánt terméket.</a:t>
+            </a:r>
+          </a:p>
+          <a:p>
+            <a:endParaRPr lang="hu-HU" sz="2800" b="1" dirty="0">
+              <a:solidFill>
+                <a:schemeClr val="bg1"/>
+              </a:solidFill>
+              <a:latin typeface="system-ui"/>
+            </a:endParaRPr>
+          </a:p>
+          <a:p>
+            <a:r>
+              <a:rPr lang="hu-HU" sz="2800" b="1" dirty="0">
+                <a:solidFill>
+                  <a:schemeClr val="bg1"/>
+                </a:solidFill>
+                <a:latin typeface="system-ui"/>
+              </a:rPr>
+              <a:t>A kategória felület megmutatja az összes kategóriát a rendszerben.</a:t>
+            </a:r>
+          </a:p>
+          <a:p>
+            <a:endParaRPr lang="hu-HU" sz="2800" b="1" dirty="0">
+              <a:solidFill>
+                <a:schemeClr val="bg1"/>
+              </a:solidFill>
+              <a:latin typeface="system-ui"/>
+            </a:endParaRPr>
+          </a:p>
+          <a:p>
+            <a:r>
+              <a:rPr lang="hu-HU" sz="2800" b="1" dirty="0">
+                <a:solidFill>
+                  <a:schemeClr val="bg1"/>
+                </a:solidFill>
+                <a:latin typeface="system-ui"/>
+              </a:rPr>
+              <a:t>Feltöltés után bekerül az adatbázisba és felkerül az</a:t>
+            </a:r>
+          </a:p>
+          <a:p>
+            <a:r>
+              <a:rPr lang="hu-HU" sz="2800" b="1" dirty="0">
+                <a:solidFill>
+                  <a:schemeClr val="bg1"/>
+                </a:solidFill>
+                <a:latin typeface="system-ui"/>
+              </a:rPr>
+              <a:t>oldalunkra.</a:t>
+            </a:r>
+          </a:p>
+        </p:txBody>
+      </p:sp>
     </p:spTree>
     <p:extLst>
       <p:ext uri="{BB962C8B-B14F-4D97-AF65-F5344CB8AC3E}">

--- a/tradely.pptx
+++ b/tradely.pptx
@@ -8,12 +8,15 @@
     <p:sldId id="256" r:id="rId2"/>
     <p:sldId id="257" r:id="rId3"/>
     <p:sldId id="258" r:id="rId4"/>
-    <p:sldId id="259" r:id="rId5"/>
-    <p:sldId id="260" r:id="rId6"/>
-    <p:sldId id="261" r:id="rId7"/>
-    <p:sldId id="262" r:id="rId8"/>
-    <p:sldId id="263" r:id="rId9"/>
-    <p:sldId id="265" r:id="rId10"/>
+    <p:sldId id="266" r:id="rId5"/>
+    <p:sldId id="259" r:id="rId6"/>
+    <p:sldId id="267" r:id="rId7"/>
+    <p:sldId id="268" r:id="rId8"/>
+    <p:sldId id="260" r:id="rId9"/>
+    <p:sldId id="261" r:id="rId10"/>
+    <p:sldId id="262" r:id="rId11"/>
+    <p:sldId id="263" r:id="rId12"/>
+    <p:sldId id="265" r:id="rId13"/>
   </p:sldIdLst>
   <p:sldSz cx="12192000" cy="6858000"/>
   <p:notesSz cx="6858000" cy="9144000"/>
@@ -267,7 +270,7 @@
           <a:p>
             <a:fld id="{99493C0A-2552-4F95-83AC-DE75FD98FCE5}" type="datetimeFigureOut">
               <a:rPr lang="hu-HU" smtClean="0"/>
-              <a:t>2026. 05. 22.</a:t>
+              <a:t>2026. 06. 05.</a:t>
             </a:fld>
             <a:endParaRPr lang="hu-HU"/>
           </a:p>
@@ -465,7 +468,7 @@
           <a:p>
             <a:fld id="{99493C0A-2552-4F95-83AC-DE75FD98FCE5}" type="datetimeFigureOut">
               <a:rPr lang="hu-HU" smtClean="0"/>
-              <a:t>2026. 05. 22.</a:t>
+              <a:t>2026. 06. 05.</a:t>
             </a:fld>
             <a:endParaRPr lang="hu-HU"/>
           </a:p>
@@ -673,7 +676,7 @@
           <a:p>
             <a:fld id="{99493C0A-2552-4F95-83AC-DE75FD98FCE5}" type="datetimeFigureOut">
               <a:rPr lang="hu-HU" smtClean="0"/>
-              <a:t>2026. 05. 22.</a:t>
+              <a:t>2026. 06. 05.</a:t>
             </a:fld>
             <a:endParaRPr lang="hu-HU"/>
           </a:p>
@@ -871,7 +874,7 @@
           <a:p>
             <a:fld id="{99493C0A-2552-4F95-83AC-DE75FD98FCE5}" type="datetimeFigureOut">
               <a:rPr lang="hu-HU" smtClean="0"/>
-              <a:t>2026. 05. 22.</a:t>
+              <a:t>2026. 06. 05.</a:t>
             </a:fld>
             <a:endParaRPr lang="hu-HU"/>
           </a:p>
@@ -1146,7 +1149,7 @@
           <a:p>
             <a:fld id="{99493C0A-2552-4F95-83AC-DE75FD98FCE5}" type="datetimeFigureOut">
               <a:rPr lang="hu-HU" smtClean="0"/>
-              <a:t>2026. 05. 22.</a:t>
+              <a:t>2026. 06. 05.</a:t>
             </a:fld>
             <a:endParaRPr lang="hu-HU"/>
           </a:p>
@@ -1411,7 +1414,7 @@
           <a:p>
             <a:fld id="{99493C0A-2552-4F95-83AC-DE75FD98FCE5}" type="datetimeFigureOut">
               <a:rPr lang="hu-HU" smtClean="0"/>
-              <a:t>2026. 05. 22.</a:t>
+              <a:t>2026. 06. 05.</a:t>
             </a:fld>
             <a:endParaRPr lang="hu-HU"/>
           </a:p>
@@ -1823,7 +1826,7 @@
           <a:p>
             <a:fld id="{99493C0A-2552-4F95-83AC-DE75FD98FCE5}" type="datetimeFigureOut">
               <a:rPr lang="hu-HU" smtClean="0"/>
-              <a:t>2026. 05. 22.</a:t>
+              <a:t>2026. 06. 05.</a:t>
             </a:fld>
             <a:endParaRPr lang="hu-HU"/>
           </a:p>
@@ -1964,7 +1967,7 @@
           <a:p>
             <a:fld id="{99493C0A-2552-4F95-83AC-DE75FD98FCE5}" type="datetimeFigureOut">
               <a:rPr lang="hu-HU" smtClean="0"/>
-              <a:t>2026. 05. 22.</a:t>
+              <a:t>2026. 06. 05.</a:t>
             </a:fld>
             <a:endParaRPr lang="hu-HU"/>
           </a:p>
@@ -2077,7 +2080,7 @@
           <a:p>
             <a:fld id="{99493C0A-2552-4F95-83AC-DE75FD98FCE5}" type="datetimeFigureOut">
               <a:rPr lang="hu-HU" smtClean="0"/>
-              <a:t>2026. 05. 22.</a:t>
+              <a:t>2026. 06. 05.</a:t>
             </a:fld>
             <a:endParaRPr lang="hu-HU"/>
           </a:p>
@@ -2388,7 +2391,7 @@
           <a:p>
             <a:fld id="{99493C0A-2552-4F95-83AC-DE75FD98FCE5}" type="datetimeFigureOut">
               <a:rPr lang="hu-HU" smtClean="0"/>
-              <a:t>2026. 05. 22.</a:t>
+              <a:t>2026. 06. 05.</a:t>
             </a:fld>
             <a:endParaRPr lang="hu-HU"/>
           </a:p>
@@ -2676,7 +2679,7 @@
           <a:p>
             <a:fld id="{99493C0A-2552-4F95-83AC-DE75FD98FCE5}" type="datetimeFigureOut">
               <a:rPr lang="hu-HU" smtClean="0"/>
-              <a:t>2026. 05. 22.</a:t>
+              <a:t>2026. 06. 05.</a:t>
             </a:fld>
             <a:endParaRPr lang="hu-HU"/>
           </a:p>
@@ -2917,7 +2920,7 @@
           <a:p>
             <a:fld id="{99493C0A-2552-4F95-83AC-DE75FD98FCE5}" type="datetimeFigureOut">
               <a:rPr lang="hu-HU" smtClean="0"/>
-              <a:t>2026. 05. 22.</a:t>
+              <a:t>2026. 06. 05.</a:t>
             </a:fld>
             <a:endParaRPr lang="hu-HU"/>
           </a:p>
@@ -3514,6 +3517,846 @@
 </p:sld>
 </file>
 
+<file path=ppt/slides/slide10.xml><?xml version="1.0" encoding="utf-8"?>
+<p:sld xmlns:a="http://schemas.openxmlformats.org/drawingml/2006/main" xmlns:r="http://schemas.openxmlformats.org/officeDocument/2006/relationships" xmlns:p="http://schemas.openxmlformats.org/presentationml/2006/main">
+  <p:cSld>
+    <p:spTree>
+      <p:nvGrpSpPr>
+        <p:cNvPr id="1" name=""/>
+        <p:cNvGrpSpPr/>
+        <p:nvPr/>
+      </p:nvGrpSpPr>
+      <p:grpSpPr>
+        <a:xfrm>
+          <a:off x="0" y="0"/>
+          <a:ext cx="0" cy="0"/>
+          <a:chOff x="0" y="0"/>
+          <a:chExt cx="0" cy="0"/>
+        </a:xfrm>
+      </p:grpSpPr>
+      <p:sp>
+        <p:nvSpPr>
+          <p:cNvPr id="2" name="Cím 1">
+            <a:extLst>
+              <a:ext uri="{FF2B5EF4-FFF2-40B4-BE49-F238E27FC236}">
+                <a16:creationId xmlns:a16="http://schemas.microsoft.com/office/drawing/2014/main" id="{D99C8C30-B780-10C0-97A7-F93678B1352E}"/>
+              </a:ext>
+            </a:extLst>
+          </p:cNvPr>
+          <p:cNvSpPr>
+            <a:spLocks noGrp="1"/>
+          </p:cNvSpPr>
+          <p:nvPr>
+            <p:ph type="title"/>
+          </p:nvPr>
+        </p:nvSpPr>
+        <p:spPr/>
+        <p:txBody>
+          <a:bodyPr/>
+          <a:lstStyle/>
+          <a:p>
+            <a:endParaRPr lang="hu-HU"/>
+          </a:p>
+        </p:txBody>
+      </p:sp>
+      <p:sp>
+        <p:nvSpPr>
+          <p:cNvPr id="3" name="Tartalom helye 2">
+            <a:extLst>
+              <a:ext uri="{FF2B5EF4-FFF2-40B4-BE49-F238E27FC236}">
+                <a16:creationId xmlns:a16="http://schemas.microsoft.com/office/drawing/2014/main" id="{9955BABC-FFFE-9D48-4184-83745BD1BA50}"/>
+              </a:ext>
+            </a:extLst>
+          </p:cNvPr>
+          <p:cNvSpPr>
+            <a:spLocks noGrp="1"/>
+          </p:cNvSpPr>
+          <p:nvPr>
+            <p:ph idx="1"/>
+          </p:nvPr>
+        </p:nvSpPr>
+        <p:spPr/>
+        <p:txBody>
+          <a:bodyPr/>
+          <a:lstStyle/>
+          <a:p>
+            <a:endParaRPr lang="hu-HU"/>
+          </a:p>
+        </p:txBody>
+      </p:sp>
+      <p:pic>
+        <p:nvPicPr>
+          <p:cNvPr id="5" name="Kép 4">
+            <a:extLst>
+              <a:ext uri="{FF2B5EF4-FFF2-40B4-BE49-F238E27FC236}">
+                <a16:creationId xmlns:a16="http://schemas.microsoft.com/office/drawing/2014/main" id="{54AB7258-3515-925D-877D-106D81FB2A61}"/>
+              </a:ext>
+            </a:extLst>
+          </p:cNvPr>
+          <p:cNvPicPr>
+            <a:picLocks noChangeAspect="1"/>
+          </p:cNvPicPr>
+          <p:nvPr/>
+        </p:nvPicPr>
+        <p:blipFill>
+          <a:blip r:embed="rId2"/>
+          <a:stretch>
+            <a:fillRect/>
+          </a:stretch>
+        </p:blipFill>
+        <p:spPr>
+          <a:xfrm>
+            <a:off x="0" y="0"/>
+            <a:ext cx="12192000" cy="6858000"/>
+          </a:xfrm>
+          <a:prstGeom prst="rect">
+            <a:avLst/>
+          </a:prstGeom>
+        </p:spPr>
+      </p:pic>
+      <p:pic>
+        <p:nvPicPr>
+          <p:cNvPr id="8" name="Kép 7">
+            <a:extLst>
+              <a:ext uri="{FF2B5EF4-FFF2-40B4-BE49-F238E27FC236}">
+                <a16:creationId xmlns:a16="http://schemas.microsoft.com/office/drawing/2014/main" id="{8E2C9792-9310-C7DF-D559-28936D573BB3}"/>
+              </a:ext>
+            </a:extLst>
+          </p:cNvPr>
+          <p:cNvPicPr>
+            <a:picLocks noChangeAspect="1"/>
+          </p:cNvPicPr>
+          <p:nvPr/>
+        </p:nvPicPr>
+        <p:blipFill>
+          <a:blip r:embed="rId3"/>
+          <a:stretch>
+            <a:fillRect/>
+          </a:stretch>
+        </p:blipFill>
+        <p:spPr>
+          <a:xfrm>
+            <a:off x="0" y="160462"/>
+            <a:ext cx="12192000" cy="6697538"/>
+          </a:xfrm>
+          <a:prstGeom prst="rect">
+            <a:avLst/>
+          </a:prstGeom>
+        </p:spPr>
+      </p:pic>
+      <p:sp>
+        <p:nvSpPr>
+          <p:cNvPr id="4" name="Téglalap 3">
+            <a:extLst>
+              <a:ext uri="{FF2B5EF4-FFF2-40B4-BE49-F238E27FC236}">
+                <a16:creationId xmlns:a16="http://schemas.microsoft.com/office/drawing/2014/main" id="{E96C047D-3CA9-AD97-30DD-DC53D6065607}"/>
+              </a:ext>
+            </a:extLst>
+          </p:cNvPr>
+          <p:cNvSpPr/>
+          <p:nvPr/>
+        </p:nvSpPr>
+        <p:spPr>
+          <a:xfrm rot="5400000">
+            <a:off x="-1205916" y="1205916"/>
+            <a:ext cx="6858000" cy="4446168"/>
+          </a:xfrm>
+          <a:prstGeom prst="rect">
+            <a:avLst/>
+          </a:prstGeom>
+          <a:gradFill flip="none" rotWithShape="1">
+            <a:gsLst>
+              <a:gs pos="0">
+                <a:schemeClr val="accent6">
+                  <a:lumMod val="67000"/>
+                </a:schemeClr>
+              </a:gs>
+              <a:gs pos="48000">
+                <a:schemeClr val="accent6">
+                  <a:lumMod val="97000"/>
+                  <a:lumOff val="3000"/>
+                </a:schemeClr>
+              </a:gs>
+              <a:gs pos="100000">
+                <a:schemeClr val="accent6">
+                  <a:lumMod val="60000"/>
+                  <a:lumOff val="40000"/>
+                </a:schemeClr>
+              </a:gs>
+            </a:gsLst>
+            <a:lin ang="16200000" scaled="1"/>
+            <a:tileRect/>
+          </a:gradFill>
+          <a:ln>
+            <a:noFill/>
+          </a:ln>
+        </p:spPr>
+        <p:style>
+          <a:lnRef idx="0">
+            <a:scrgbClr r="0" g="0" b="0"/>
+          </a:lnRef>
+          <a:fillRef idx="0">
+            <a:scrgbClr r="0" g="0" b="0"/>
+          </a:fillRef>
+          <a:effectRef idx="0">
+            <a:scrgbClr r="0" g="0" b="0"/>
+          </a:effectRef>
+          <a:fontRef idx="minor">
+            <a:schemeClr val="lt1"/>
+          </a:fontRef>
+        </p:style>
+        <p:txBody>
+          <a:bodyPr rtlCol="0" anchor="ctr"/>
+          <a:lstStyle/>
+          <a:p>
+            <a:pPr algn="ctr"/>
+            <a:endParaRPr lang="hu-HU"/>
+          </a:p>
+        </p:txBody>
+      </p:sp>
+      <p:sp>
+        <p:nvSpPr>
+          <p:cNvPr id="6" name="Szövegdoboz 5">
+            <a:extLst>
+              <a:ext uri="{FF2B5EF4-FFF2-40B4-BE49-F238E27FC236}">
+                <a16:creationId xmlns:a16="http://schemas.microsoft.com/office/drawing/2014/main" id="{3B9BE9C7-AE59-99C2-2E6E-9F4F92BA1495}"/>
+              </a:ext>
+            </a:extLst>
+          </p:cNvPr>
+          <p:cNvSpPr txBox="1"/>
+          <p:nvPr/>
+        </p:nvSpPr>
+        <p:spPr>
+          <a:xfrm>
+            <a:off x="163587" y="797510"/>
+            <a:ext cx="4118994" cy="5262979"/>
+          </a:xfrm>
+          <a:prstGeom prst="rect">
+            <a:avLst/>
+          </a:prstGeom>
+          <a:noFill/>
+        </p:spPr>
+        <p:txBody>
+          <a:bodyPr wrap="square" rtlCol="0">
+            <a:spAutoFit/>
+          </a:bodyPr>
+          <a:lstStyle/>
+          <a:p>
+            <a:r>
+              <a:rPr lang="hu-HU" sz="2800" b="1" dirty="0">
+                <a:solidFill>
+                  <a:schemeClr val="bg1"/>
+                </a:solidFill>
+                <a:latin typeface="system-ui"/>
+              </a:rPr>
+              <a:t>A profil felület.</a:t>
+            </a:r>
+          </a:p>
+          <a:p>
+            <a:endParaRPr lang="hu-HU" sz="2800" b="1" dirty="0">
+              <a:solidFill>
+                <a:schemeClr val="bg1"/>
+              </a:solidFill>
+              <a:latin typeface="system-ui"/>
+            </a:endParaRPr>
+          </a:p>
+          <a:p>
+            <a:r>
+              <a:rPr lang="hu-HU" sz="2800" b="1" dirty="0">
+                <a:solidFill>
+                  <a:schemeClr val="bg1"/>
+                </a:solidFill>
+                <a:latin typeface="system-ui"/>
+              </a:rPr>
+              <a:t>Itt tud a felhasználó a fiókjával kapcsolatos  intézkedéseket figyelni.</a:t>
+            </a:r>
+          </a:p>
+          <a:p>
+            <a:endParaRPr lang="hu-HU" sz="2800" b="1" dirty="0">
+              <a:solidFill>
+                <a:schemeClr val="bg1"/>
+              </a:solidFill>
+              <a:latin typeface="system-ui"/>
+            </a:endParaRPr>
+          </a:p>
+          <a:p>
+            <a:r>
+              <a:rPr lang="hu-HU" sz="2800" b="1" dirty="0">
+                <a:solidFill>
+                  <a:schemeClr val="bg1"/>
+                </a:solidFill>
+                <a:latin typeface="system-ui"/>
+              </a:rPr>
+              <a:t>Tud nevet váltani vagy </a:t>
+            </a:r>
+            <a:r>
+              <a:rPr lang="hu-HU" sz="2800" b="1" dirty="0" err="1">
+                <a:solidFill>
+                  <a:schemeClr val="bg1"/>
+                </a:solidFill>
+                <a:latin typeface="system-ui"/>
+              </a:rPr>
+              <a:t>jelszavat</a:t>
+            </a:r>
+            <a:r>
+              <a:rPr lang="hu-HU" sz="2800" b="1" dirty="0">
+                <a:solidFill>
+                  <a:schemeClr val="bg1"/>
+                </a:solidFill>
+                <a:latin typeface="system-ui"/>
+              </a:rPr>
+              <a:t> váltani, ha szükségére esik.</a:t>
+            </a:r>
+          </a:p>
+          <a:p>
+            <a:endParaRPr lang="hu-HU" sz="2800" b="1" dirty="0">
+              <a:solidFill>
+                <a:schemeClr val="bg1"/>
+              </a:solidFill>
+              <a:latin typeface="system-ui"/>
+            </a:endParaRPr>
+          </a:p>
+          <a:p>
+            <a:r>
+              <a:rPr lang="hu-HU" sz="2800" b="1" dirty="0">
+                <a:solidFill>
+                  <a:schemeClr val="bg1"/>
+                </a:solidFill>
+                <a:latin typeface="system-ui"/>
+              </a:rPr>
+              <a:t>Ki tud jelentkezni ha befejezte a vásárlást.</a:t>
+            </a:r>
+          </a:p>
+        </p:txBody>
+      </p:sp>
+    </p:spTree>
+    <p:extLst>
+      <p:ext uri="{BB962C8B-B14F-4D97-AF65-F5344CB8AC3E}">
+        <p14:creationId xmlns:p14="http://schemas.microsoft.com/office/powerpoint/2010/main" val="3135840362"/>
+      </p:ext>
+    </p:extLst>
+  </p:cSld>
+  <p:clrMapOvr>
+    <a:masterClrMapping/>
+  </p:clrMapOvr>
+</p:sld>
+</file>
+
+<file path=ppt/slides/slide11.xml><?xml version="1.0" encoding="utf-8"?>
+<p:sld xmlns:a="http://schemas.openxmlformats.org/drawingml/2006/main" xmlns:r="http://schemas.openxmlformats.org/officeDocument/2006/relationships" xmlns:p="http://schemas.openxmlformats.org/presentationml/2006/main">
+  <p:cSld>
+    <p:spTree>
+      <p:nvGrpSpPr>
+        <p:cNvPr id="1" name=""/>
+        <p:cNvGrpSpPr/>
+        <p:nvPr/>
+      </p:nvGrpSpPr>
+      <p:grpSpPr>
+        <a:xfrm>
+          <a:off x="0" y="0"/>
+          <a:ext cx="0" cy="0"/>
+          <a:chOff x="0" y="0"/>
+          <a:chExt cx="0" cy="0"/>
+        </a:xfrm>
+      </p:grpSpPr>
+      <p:sp>
+        <p:nvSpPr>
+          <p:cNvPr id="2" name="Cím 1">
+            <a:extLst>
+              <a:ext uri="{FF2B5EF4-FFF2-40B4-BE49-F238E27FC236}">
+                <a16:creationId xmlns:a16="http://schemas.microsoft.com/office/drawing/2014/main" id="{64266DAB-2D3B-6FB5-72DA-8E174C75C409}"/>
+              </a:ext>
+            </a:extLst>
+          </p:cNvPr>
+          <p:cNvSpPr>
+            <a:spLocks noGrp="1"/>
+          </p:cNvSpPr>
+          <p:nvPr>
+            <p:ph type="title"/>
+          </p:nvPr>
+        </p:nvSpPr>
+        <p:spPr/>
+        <p:txBody>
+          <a:bodyPr/>
+          <a:lstStyle/>
+          <a:p>
+            <a:endParaRPr lang="hu-HU" dirty="0"/>
+          </a:p>
+        </p:txBody>
+      </p:sp>
+      <p:sp>
+        <p:nvSpPr>
+          <p:cNvPr id="3" name="Tartalom helye 2">
+            <a:extLst>
+              <a:ext uri="{FF2B5EF4-FFF2-40B4-BE49-F238E27FC236}">
+                <a16:creationId xmlns:a16="http://schemas.microsoft.com/office/drawing/2014/main" id="{084767BD-0480-DC2D-1464-1CFA4F3C82A6}"/>
+              </a:ext>
+            </a:extLst>
+          </p:cNvPr>
+          <p:cNvSpPr>
+            <a:spLocks noGrp="1"/>
+          </p:cNvSpPr>
+          <p:nvPr>
+            <p:ph idx="1"/>
+          </p:nvPr>
+        </p:nvSpPr>
+        <p:spPr/>
+        <p:txBody>
+          <a:bodyPr/>
+          <a:lstStyle/>
+          <a:p>
+            <a:endParaRPr lang="hu-HU"/>
+          </a:p>
+        </p:txBody>
+      </p:sp>
+      <p:pic>
+        <p:nvPicPr>
+          <p:cNvPr id="5" name="Kép 4">
+            <a:extLst>
+              <a:ext uri="{FF2B5EF4-FFF2-40B4-BE49-F238E27FC236}">
+                <a16:creationId xmlns:a16="http://schemas.microsoft.com/office/drawing/2014/main" id="{0DEEBEA9-1DD1-A45F-DC7B-852EB64CC708}"/>
+              </a:ext>
+            </a:extLst>
+          </p:cNvPr>
+          <p:cNvPicPr>
+            <a:picLocks noChangeAspect="1"/>
+          </p:cNvPicPr>
+          <p:nvPr/>
+        </p:nvPicPr>
+        <p:blipFill>
+          <a:blip r:embed="rId2"/>
+          <a:stretch>
+            <a:fillRect/>
+          </a:stretch>
+        </p:blipFill>
+        <p:spPr>
+          <a:xfrm>
+            <a:off x="0" y="0"/>
+            <a:ext cx="12192000" cy="6858000"/>
+          </a:xfrm>
+          <a:prstGeom prst="rect">
+            <a:avLst/>
+          </a:prstGeom>
+        </p:spPr>
+      </p:pic>
+      <p:pic>
+        <p:nvPicPr>
+          <p:cNvPr id="7" name="Kép 6">
+            <a:extLst>
+              <a:ext uri="{FF2B5EF4-FFF2-40B4-BE49-F238E27FC236}">
+                <a16:creationId xmlns:a16="http://schemas.microsoft.com/office/drawing/2014/main" id="{76CBAC68-B49F-4137-8ABE-D9695E759B34}"/>
+              </a:ext>
+            </a:extLst>
+          </p:cNvPr>
+          <p:cNvPicPr>
+            <a:picLocks noChangeAspect="1"/>
+          </p:cNvPicPr>
+          <p:nvPr/>
+        </p:nvPicPr>
+        <p:blipFill>
+          <a:blip r:embed="rId3"/>
+          <a:stretch>
+            <a:fillRect/>
+          </a:stretch>
+        </p:blipFill>
+        <p:spPr>
+          <a:xfrm>
+            <a:off x="3471508" y="533378"/>
+            <a:ext cx="5077534" cy="419121"/>
+          </a:xfrm>
+          <a:prstGeom prst="rect">
+            <a:avLst/>
+          </a:prstGeom>
+        </p:spPr>
+      </p:pic>
+      <p:sp>
+        <p:nvSpPr>
+          <p:cNvPr id="4" name="Téglalap 3">
+            <a:extLst>
+              <a:ext uri="{FF2B5EF4-FFF2-40B4-BE49-F238E27FC236}">
+                <a16:creationId xmlns:a16="http://schemas.microsoft.com/office/drawing/2014/main" id="{6FFCED1D-1BCA-ED75-DE7D-7C26070D8CD4}"/>
+              </a:ext>
+            </a:extLst>
+          </p:cNvPr>
+          <p:cNvSpPr/>
+          <p:nvPr/>
+        </p:nvSpPr>
+        <p:spPr>
+          <a:xfrm rot="5400000">
+            <a:off x="-1205916" y="1205916"/>
+            <a:ext cx="6858000" cy="4446168"/>
+          </a:xfrm>
+          <a:prstGeom prst="rect">
+            <a:avLst/>
+          </a:prstGeom>
+          <a:gradFill flip="none" rotWithShape="1">
+            <a:gsLst>
+              <a:gs pos="0">
+                <a:schemeClr val="accent6">
+                  <a:lumMod val="67000"/>
+                </a:schemeClr>
+              </a:gs>
+              <a:gs pos="48000">
+                <a:schemeClr val="accent6">
+                  <a:lumMod val="97000"/>
+                  <a:lumOff val="3000"/>
+                </a:schemeClr>
+              </a:gs>
+              <a:gs pos="100000">
+                <a:schemeClr val="accent6">
+                  <a:lumMod val="60000"/>
+                  <a:lumOff val="40000"/>
+                </a:schemeClr>
+              </a:gs>
+            </a:gsLst>
+            <a:lin ang="16200000" scaled="1"/>
+            <a:tileRect/>
+          </a:gradFill>
+          <a:ln>
+            <a:noFill/>
+          </a:ln>
+        </p:spPr>
+        <p:style>
+          <a:lnRef idx="0">
+            <a:scrgbClr r="0" g="0" b="0"/>
+          </a:lnRef>
+          <a:fillRef idx="0">
+            <a:scrgbClr r="0" g="0" b="0"/>
+          </a:fillRef>
+          <a:effectRef idx="0">
+            <a:scrgbClr r="0" g="0" b="0"/>
+          </a:effectRef>
+          <a:fontRef idx="minor">
+            <a:schemeClr val="lt1"/>
+          </a:fontRef>
+        </p:style>
+        <p:txBody>
+          <a:bodyPr rtlCol="0" anchor="ctr"/>
+          <a:lstStyle/>
+          <a:p>
+            <a:pPr algn="ctr"/>
+            <a:endParaRPr lang="hu-HU"/>
+          </a:p>
+        </p:txBody>
+      </p:sp>
+      <p:sp>
+        <p:nvSpPr>
+          <p:cNvPr id="6" name="Szövegdoboz 5">
+            <a:extLst>
+              <a:ext uri="{FF2B5EF4-FFF2-40B4-BE49-F238E27FC236}">
+                <a16:creationId xmlns:a16="http://schemas.microsoft.com/office/drawing/2014/main" id="{F10B5774-A644-10B9-9978-B4607EFC5ADF}"/>
+              </a:ext>
+            </a:extLst>
+          </p:cNvPr>
+          <p:cNvSpPr txBox="1"/>
+          <p:nvPr/>
+        </p:nvSpPr>
+        <p:spPr>
+          <a:xfrm>
+            <a:off x="163587" y="582067"/>
+            <a:ext cx="4118994" cy="5693866"/>
+          </a:xfrm>
+          <a:prstGeom prst="rect">
+            <a:avLst/>
+          </a:prstGeom>
+          <a:noFill/>
+        </p:spPr>
+        <p:txBody>
+          <a:bodyPr wrap="square" rtlCol="0">
+            <a:spAutoFit/>
+          </a:bodyPr>
+          <a:lstStyle/>
+          <a:p>
+            <a:r>
+              <a:rPr lang="hu-HU" sz="2800" b="1" dirty="0">
+                <a:solidFill>
+                  <a:schemeClr val="bg1"/>
+                </a:solidFill>
+                <a:latin typeface="system-ui"/>
+              </a:rPr>
+              <a:t>Az eladás felület.</a:t>
+            </a:r>
+          </a:p>
+          <a:p>
+            <a:endParaRPr lang="hu-HU" sz="2800" b="1" dirty="0">
+              <a:solidFill>
+                <a:schemeClr val="bg1"/>
+              </a:solidFill>
+              <a:latin typeface="system-ui"/>
+            </a:endParaRPr>
+          </a:p>
+          <a:p>
+            <a:r>
+              <a:rPr lang="hu-HU" sz="2800" b="1" dirty="0">
+                <a:solidFill>
+                  <a:schemeClr val="bg1"/>
+                </a:solidFill>
+                <a:latin typeface="system-ui"/>
+              </a:rPr>
+              <a:t>Itt tud a felhasználó feltölteni eladásra kívánt terméket.</a:t>
+            </a:r>
+          </a:p>
+          <a:p>
+            <a:endParaRPr lang="hu-HU" sz="2800" b="1" dirty="0">
+              <a:solidFill>
+                <a:schemeClr val="bg1"/>
+              </a:solidFill>
+              <a:latin typeface="system-ui"/>
+            </a:endParaRPr>
+          </a:p>
+          <a:p>
+            <a:r>
+              <a:rPr lang="hu-HU" sz="2800" b="1" dirty="0">
+                <a:solidFill>
+                  <a:schemeClr val="bg1"/>
+                </a:solidFill>
+                <a:latin typeface="system-ui"/>
+              </a:rPr>
+              <a:t>A kategória felület megmutatja az összes kategóriát a rendszerben.</a:t>
+            </a:r>
+          </a:p>
+          <a:p>
+            <a:endParaRPr lang="hu-HU" sz="2800" b="1" dirty="0">
+              <a:solidFill>
+                <a:schemeClr val="bg1"/>
+              </a:solidFill>
+              <a:latin typeface="system-ui"/>
+            </a:endParaRPr>
+          </a:p>
+          <a:p>
+            <a:r>
+              <a:rPr lang="hu-HU" sz="2800" b="1" dirty="0">
+                <a:solidFill>
+                  <a:schemeClr val="bg1"/>
+                </a:solidFill>
+                <a:latin typeface="system-ui"/>
+              </a:rPr>
+              <a:t>Feltöltés után bekerül az adatbázisba és felkerül az</a:t>
+            </a:r>
+          </a:p>
+          <a:p>
+            <a:r>
+              <a:rPr lang="hu-HU" sz="2800" b="1" dirty="0">
+                <a:solidFill>
+                  <a:schemeClr val="bg1"/>
+                </a:solidFill>
+                <a:latin typeface="system-ui"/>
+              </a:rPr>
+              <a:t>oldalunkra.</a:t>
+            </a:r>
+          </a:p>
+        </p:txBody>
+      </p:sp>
+    </p:spTree>
+    <p:extLst>
+      <p:ext uri="{BB962C8B-B14F-4D97-AF65-F5344CB8AC3E}">
+        <p14:creationId xmlns:p14="http://schemas.microsoft.com/office/powerpoint/2010/main" val="2229886032"/>
+      </p:ext>
+    </p:extLst>
+  </p:cSld>
+  <p:clrMapOvr>
+    <a:masterClrMapping/>
+  </p:clrMapOvr>
+</p:sld>
+</file>
+
+<file path=ppt/slides/slide12.xml><?xml version="1.0" encoding="utf-8"?>
+<p:sld xmlns:a="http://schemas.openxmlformats.org/drawingml/2006/main" xmlns:r="http://schemas.openxmlformats.org/officeDocument/2006/relationships" xmlns:p="http://schemas.openxmlformats.org/presentationml/2006/main">
+  <p:cSld>
+    <p:spTree>
+      <p:nvGrpSpPr>
+        <p:cNvPr id="1" name=""/>
+        <p:cNvGrpSpPr/>
+        <p:nvPr/>
+      </p:nvGrpSpPr>
+      <p:grpSpPr>
+        <a:xfrm>
+          <a:off x="0" y="0"/>
+          <a:ext cx="0" cy="0"/>
+          <a:chOff x="0" y="0"/>
+          <a:chExt cx="0" cy="0"/>
+        </a:xfrm>
+      </p:grpSpPr>
+      <p:sp>
+        <p:nvSpPr>
+          <p:cNvPr id="2" name="Cím 1">
+            <a:extLst>
+              <a:ext uri="{FF2B5EF4-FFF2-40B4-BE49-F238E27FC236}">
+                <a16:creationId xmlns:a16="http://schemas.microsoft.com/office/drawing/2014/main" id="{88F078C4-315D-F60E-2514-AD927602C475}"/>
+              </a:ext>
+            </a:extLst>
+          </p:cNvPr>
+          <p:cNvSpPr>
+            <a:spLocks noGrp="1"/>
+          </p:cNvSpPr>
+          <p:nvPr>
+            <p:ph type="ctrTitle"/>
+          </p:nvPr>
+        </p:nvSpPr>
+        <p:spPr/>
+        <p:txBody>
+          <a:bodyPr/>
+          <a:lstStyle/>
+          <a:p>
+            <a:endParaRPr lang="hu-HU"/>
+          </a:p>
+        </p:txBody>
+      </p:sp>
+      <p:sp>
+        <p:nvSpPr>
+          <p:cNvPr id="3" name="Alcím 2">
+            <a:extLst>
+              <a:ext uri="{FF2B5EF4-FFF2-40B4-BE49-F238E27FC236}">
+                <a16:creationId xmlns:a16="http://schemas.microsoft.com/office/drawing/2014/main" id="{570A3EA4-E102-D797-4CC6-8166CFFA43EE}"/>
+              </a:ext>
+            </a:extLst>
+          </p:cNvPr>
+          <p:cNvSpPr>
+            <a:spLocks noGrp="1"/>
+          </p:cNvSpPr>
+          <p:nvPr>
+            <p:ph type="subTitle" idx="1"/>
+          </p:nvPr>
+        </p:nvSpPr>
+        <p:spPr/>
+        <p:txBody>
+          <a:bodyPr/>
+          <a:lstStyle/>
+          <a:p>
+            <a:endParaRPr lang="hu-HU"/>
+          </a:p>
+        </p:txBody>
+      </p:sp>
+      <p:pic>
+        <p:nvPicPr>
+          <p:cNvPr id="5" name="Kép 4">
+            <a:extLst>
+              <a:ext uri="{FF2B5EF4-FFF2-40B4-BE49-F238E27FC236}">
+                <a16:creationId xmlns:a16="http://schemas.microsoft.com/office/drawing/2014/main" id="{18E80F12-DE83-4CAC-99EE-483E94467085}"/>
+              </a:ext>
+            </a:extLst>
+          </p:cNvPr>
+          <p:cNvPicPr>
+            <a:picLocks noChangeAspect="1"/>
+          </p:cNvPicPr>
+          <p:nvPr/>
+        </p:nvPicPr>
+        <p:blipFill>
+          <a:blip r:embed="rId2"/>
+          <a:stretch>
+            <a:fillRect/>
+          </a:stretch>
+        </p:blipFill>
+        <p:spPr>
+          <a:xfrm>
+            <a:off x="-37052" y="-1"/>
+            <a:ext cx="12192000" cy="6858000"/>
+          </a:xfrm>
+          <a:prstGeom prst="rect">
+            <a:avLst/>
+          </a:prstGeom>
+        </p:spPr>
+      </p:pic>
+      <p:pic>
+        <p:nvPicPr>
+          <p:cNvPr id="7" name="Kép 6">
+            <a:extLst>
+              <a:ext uri="{FF2B5EF4-FFF2-40B4-BE49-F238E27FC236}">
+                <a16:creationId xmlns:a16="http://schemas.microsoft.com/office/drawing/2014/main" id="{B4693484-7845-3F92-C2F7-BF66F3373BAC}"/>
+              </a:ext>
+            </a:extLst>
+          </p:cNvPr>
+          <p:cNvPicPr>
+            <a:picLocks noChangeAspect="1"/>
+          </p:cNvPicPr>
+          <p:nvPr/>
+        </p:nvPicPr>
+        <p:blipFill>
+          <a:blip r:embed="rId3">
+            <a:extLst>
+              <a:ext uri="{28A0092B-C50C-407E-A947-70E740481C1C}">
+                <a14:useLocalDpi xmlns:a14="http://schemas.microsoft.com/office/drawing/2010/main" val="0"/>
+              </a:ext>
+            </a:extLst>
+          </a:blip>
+          <a:stretch>
+            <a:fillRect/>
+          </a:stretch>
+        </p:blipFill>
+        <p:spPr>
+          <a:xfrm>
+            <a:off x="2799813" y="2151647"/>
+            <a:ext cx="2810312" cy="2810312"/>
+          </a:xfrm>
+          <a:prstGeom prst="rect">
+            <a:avLst/>
+          </a:prstGeom>
+        </p:spPr>
+      </p:pic>
+      <p:sp>
+        <p:nvSpPr>
+          <p:cNvPr id="8" name="Szövegdoboz 7">
+            <a:extLst>
+              <a:ext uri="{FF2B5EF4-FFF2-40B4-BE49-F238E27FC236}">
+                <a16:creationId xmlns:a16="http://schemas.microsoft.com/office/drawing/2014/main" id="{07A0D04E-3CB7-2CA8-E811-6A78314B29A2}"/>
+              </a:ext>
+            </a:extLst>
+          </p:cNvPr>
+          <p:cNvSpPr txBox="1"/>
+          <p:nvPr/>
+        </p:nvSpPr>
+        <p:spPr>
+          <a:xfrm>
+            <a:off x="5488469" y="3059348"/>
+            <a:ext cx="6740583" cy="1384995"/>
+          </a:xfrm>
+          <a:prstGeom prst="rect">
+            <a:avLst/>
+          </a:prstGeom>
+          <a:noFill/>
+        </p:spPr>
+        <p:txBody>
+          <a:bodyPr wrap="square" rtlCol="0">
+            <a:spAutoFit/>
+          </a:bodyPr>
+          <a:lstStyle/>
+          <a:p>
+            <a:r>
+              <a:rPr lang="hu-HU" sz="6600" b="1" dirty="0" err="1">
+                <a:solidFill>
+                  <a:srgbClr val="FFFFFF"/>
+                </a:solidFill>
+                <a:effectLst/>
+                <a:latin typeface="system-ui"/>
+              </a:rPr>
+              <a:t>Tradely</a:t>
+            </a:r>
+            <a:endParaRPr lang="hu-HU" b="1" dirty="0">
+              <a:solidFill>
+                <a:srgbClr val="FFFFFF"/>
+              </a:solidFill>
+              <a:effectLst/>
+              <a:latin typeface="system-ui"/>
+            </a:endParaRPr>
+          </a:p>
+          <a:p>
+            <a:endParaRPr lang="hu-HU" dirty="0"/>
+          </a:p>
+        </p:txBody>
+      </p:sp>
+    </p:spTree>
+    <p:extLst>
+      <p:ext uri="{BB962C8B-B14F-4D97-AF65-F5344CB8AC3E}">
+        <p14:creationId xmlns:p14="http://schemas.microsoft.com/office/powerpoint/2010/main" val="1471465044"/>
+      </p:ext>
+    </p:extLst>
+  </p:cSld>
+  <p:clrMapOvr>
+    <a:masterClrMapping/>
+  </p:clrMapOvr>
+</p:sld>
+</file>
+
 <file path=ppt/slides/slide2.xml><?xml version="1.0" encoding="utf-8"?>
 <p:sld xmlns:a="http://schemas.openxmlformats.org/drawingml/2006/main" xmlns:r="http://schemas.openxmlformats.org/officeDocument/2006/relationships" xmlns:p="http://schemas.openxmlformats.org/presentationml/2006/main">
   <p:cSld>
@@ -4006,6 +4849,234 @@
           <p:cNvPr id="2" name="Cím 1">
             <a:extLst>
               <a:ext uri="{FF2B5EF4-FFF2-40B4-BE49-F238E27FC236}">
+                <a16:creationId xmlns:a16="http://schemas.microsoft.com/office/drawing/2014/main" id="{A2491E63-3BBD-4EE7-8C16-4D2D79218EE2}"/>
+              </a:ext>
+            </a:extLst>
+          </p:cNvPr>
+          <p:cNvSpPr>
+            <a:spLocks noGrp="1"/>
+          </p:cNvSpPr>
+          <p:nvPr>
+            <p:ph type="title"/>
+          </p:nvPr>
+        </p:nvSpPr>
+        <p:spPr/>
+        <p:txBody>
+          <a:bodyPr/>
+          <a:lstStyle/>
+          <a:p>
+            <a:endParaRPr lang="hu-HU" dirty="0"/>
+          </a:p>
+        </p:txBody>
+      </p:sp>
+      <p:sp>
+        <p:nvSpPr>
+          <p:cNvPr id="3" name="Tartalom helye 2">
+            <a:extLst>
+              <a:ext uri="{FF2B5EF4-FFF2-40B4-BE49-F238E27FC236}">
+                <a16:creationId xmlns:a16="http://schemas.microsoft.com/office/drawing/2014/main" id="{00D9DA37-D2D4-4F62-BA92-0EA578D7C03A}"/>
+              </a:ext>
+            </a:extLst>
+          </p:cNvPr>
+          <p:cNvSpPr>
+            <a:spLocks noGrp="1"/>
+          </p:cNvSpPr>
+          <p:nvPr>
+            <p:ph idx="1"/>
+          </p:nvPr>
+        </p:nvSpPr>
+        <p:spPr/>
+        <p:txBody>
+          <a:bodyPr/>
+          <a:lstStyle/>
+          <a:p>
+            <a:endParaRPr lang="hu-HU"/>
+          </a:p>
+        </p:txBody>
+      </p:sp>
+      <p:pic>
+        <p:nvPicPr>
+          <p:cNvPr id="5" name="Kép 4">
+            <a:extLst>
+              <a:ext uri="{FF2B5EF4-FFF2-40B4-BE49-F238E27FC236}">
+                <a16:creationId xmlns:a16="http://schemas.microsoft.com/office/drawing/2014/main" id="{4DB2B703-B247-47E6-9EA5-F076D1323533}"/>
+              </a:ext>
+            </a:extLst>
+          </p:cNvPr>
+          <p:cNvPicPr>
+            <a:picLocks noChangeAspect="1"/>
+          </p:cNvPicPr>
+          <p:nvPr/>
+        </p:nvPicPr>
+        <p:blipFill>
+          <a:blip r:embed="rId2"/>
+          <a:stretch>
+            <a:fillRect/>
+          </a:stretch>
+        </p:blipFill>
+        <p:spPr>
+          <a:xfrm>
+            <a:off x="0" y="0"/>
+            <a:ext cx="5732036" cy="6858000"/>
+          </a:xfrm>
+          <a:prstGeom prst="rect">
+            <a:avLst/>
+          </a:prstGeom>
+        </p:spPr>
+      </p:pic>
+      <p:pic>
+        <p:nvPicPr>
+          <p:cNvPr id="7" name="Kép 6">
+            <a:extLst>
+              <a:ext uri="{FF2B5EF4-FFF2-40B4-BE49-F238E27FC236}">
+                <a16:creationId xmlns:a16="http://schemas.microsoft.com/office/drawing/2014/main" id="{EB8E0B48-143C-4BDA-B53E-F2F4601ED16C}"/>
+              </a:ext>
+            </a:extLst>
+          </p:cNvPr>
+          <p:cNvPicPr>
+            <a:picLocks noChangeAspect="1"/>
+          </p:cNvPicPr>
+          <p:nvPr/>
+        </p:nvPicPr>
+        <p:blipFill>
+          <a:blip r:embed="rId3"/>
+          <a:stretch>
+            <a:fillRect/>
+          </a:stretch>
+        </p:blipFill>
+        <p:spPr>
+          <a:xfrm>
+            <a:off x="5732037" y="0"/>
+            <a:ext cx="6459964" cy="6858000"/>
+          </a:xfrm>
+          <a:prstGeom prst="rect">
+            <a:avLst/>
+          </a:prstGeom>
+        </p:spPr>
+      </p:pic>
+      <p:sp>
+        <p:nvSpPr>
+          <p:cNvPr id="8" name="Szövegdoboz 7">
+            <a:extLst>
+              <a:ext uri="{FF2B5EF4-FFF2-40B4-BE49-F238E27FC236}">
+                <a16:creationId xmlns:a16="http://schemas.microsoft.com/office/drawing/2014/main" id="{3BF4AAF2-D355-489E-918E-11522E39DD6F}"/>
+              </a:ext>
+            </a:extLst>
+          </p:cNvPr>
+          <p:cNvSpPr txBox="1"/>
+          <p:nvPr/>
+        </p:nvSpPr>
+        <p:spPr>
+          <a:xfrm>
+            <a:off x="3115734" y="5992297"/>
+            <a:ext cx="2421466" cy="369332"/>
+          </a:xfrm>
+          <a:prstGeom prst="rect">
+            <a:avLst/>
+          </a:prstGeom>
+          <a:noFill/>
+        </p:spPr>
+        <p:txBody>
+          <a:bodyPr wrap="square" rtlCol="0">
+            <a:spAutoFit/>
+          </a:bodyPr>
+          <a:lstStyle/>
+          <a:p>
+            <a:r>
+              <a:rPr lang="hu-HU" dirty="0" err="1">
+                <a:solidFill>
+                  <a:schemeClr val="bg1"/>
+                </a:solidFill>
+              </a:rPr>
+              <a:t>register_validate.php</a:t>
+            </a:r>
+            <a:endParaRPr lang="hu-HU" dirty="0">
+              <a:solidFill>
+                <a:schemeClr val="bg1"/>
+              </a:solidFill>
+            </a:endParaRPr>
+          </a:p>
+        </p:txBody>
+      </p:sp>
+      <p:sp>
+        <p:nvSpPr>
+          <p:cNvPr id="9" name="Szövegdoboz 8">
+            <a:extLst>
+              <a:ext uri="{FF2B5EF4-FFF2-40B4-BE49-F238E27FC236}">
+                <a16:creationId xmlns:a16="http://schemas.microsoft.com/office/drawing/2014/main" id="{2DE60B07-6375-4B61-876C-143359EDEDA2}"/>
+              </a:ext>
+            </a:extLst>
+          </p:cNvPr>
+          <p:cNvSpPr txBox="1"/>
+          <p:nvPr/>
+        </p:nvSpPr>
+        <p:spPr>
+          <a:xfrm>
+            <a:off x="9618134" y="5985179"/>
+            <a:ext cx="2421466" cy="369332"/>
+          </a:xfrm>
+          <a:prstGeom prst="rect">
+            <a:avLst/>
+          </a:prstGeom>
+          <a:noFill/>
+        </p:spPr>
+        <p:txBody>
+          <a:bodyPr wrap="square" rtlCol="0">
+            <a:spAutoFit/>
+          </a:bodyPr>
+          <a:lstStyle/>
+          <a:p>
+            <a:r>
+              <a:rPr lang="hu-HU" dirty="0" err="1">
+                <a:solidFill>
+                  <a:schemeClr val="bg1"/>
+                </a:solidFill>
+              </a:rPr>
+              <a:t>validate.php</a:t>
+            </a:r>
+            <a:endParaRPr lang="hu-HU" dirty="0">
+              <a:solidFill>
+                <a:schemeClr val="bg1"/>
+              </a:solidFill>
+            </a:endParaRPr>
+          </a:p>
+        </p:txBody>
+      </p:sp>
+    </p:spTree>
+    <p:extLst>
+      <p:ext uri="{BB962C8B-B14F-4D97-AF65-F5344CB8AC3E}">
+        <p14:creationId xmlns:p14="http://schemas.microsoft.com/office/powerpoint/2010/main" val="2082544332"/>
+      </p:ext>
+    </p:extLst>
+  </p:cSld>
+  <p:clrMapOvr>
+    <a:masterClrMapping/>
+  </p:clrMapOvr>
+</p:sld>
+</file>
+
+<file path=ppt/slides/slide5.xml><?xml version="1.0" encoding="utf-8"?>
+<p:sld xmlns:a="http://schemas.openxmlformats.org/drawingml/2006/main" xmlns:r="http://schemas.openxmlformats.org/officeDocument/2006/relationships" xmlns:p="http://schemas.openxmlformats.org/presentationml/2006/main">
+  <p:cSld>
+    <p:spTree>
+      <p:nvGrpSpPr>
+        <p:cNvPr id="1" name=""/>
+        <p:cNvGrpSpPr/>
+        <p:nvPr/>
+      </p:nvGrpSpPr>
+      <p:grpSpPr>
+        <a:xfrm>
+          <a:off x="0" y="0"/>
+          <a:ext cx="0" cy="0"/>
+          <a:chOff x="0" y="0"/>
+          <a:chExt cx="0" cy="0"/>
+        </a:xfrm>
+      </p:grpSpPr>
+      <p:sp>
+        <p:nvSpPr>
+          <p:cNvPr id="2" name="Cím 1">
+            <a:extLst>
+              <a:ext uri="{FF2B5EF4-FFF2-40B4-BE49-F238E27FC236}">
                 <a16:creationId xmlns:a16="http://schemas.microsoft.com/office/drawing/2014/main" id="{1328E576-B358-8E0B-D7AF-1CE670040C37}"/>
               </a:ext>
             </a:extLst>
@@ -4124,7 +5195,405 @@
 </p:sld>
 </file>
 
-<file path=ppt/slides/slide5.xml><?xml version="1.0" encoding="utf-8"?>
+<file path=ppt/slides/slide6.xml><?xml version="1.0" encoding="utf-8"?>
+<p:sld xmlns:a="http://schemas.openxmlformats.org/drawingml/2006/main" xmlns:r="http://schemas.openxmlformats.org/officeDocument/2006/relationships" xmlns:p="http://schemas.openxmlformats.org/presentationml/2006/main">
+  <p:cSld>
+    <p:spTree>
+      <p:nvGrpSpPr>
+        <p:cNvPr id="1" name=""/>
+        <p:cNvGrpSpPr/>
+        <p:nvPr/>
+      </p:nvGrpSpPr>
+      <p:grpSpPr>
+        <a:xfrm>
+          <a:off x="0" y="0"/>
+          <a:ext cx="0" cy="0"/>
+          <a:chOff x="0" y="0"/>
+          <a:chExt cx="0" cy="0"/>
+        </a:xfrm>
+      </p:grpSpPr>
+      <p:pic>
+        <p:nvPicPr>
+          <p:cNvPr id="8" name="Picture 2" descr="Panko | Cats of the Web">
+            <a:extLst>
+              <a:ext uri="{FF2B5EF4-FFF2-40B4-BE49-F238E27FC236}">
+                <a16:creationId xmlns:a16="http://schemas.microsoft.com/office/drawing/2014/main" id="{829A79DB-555A-4CC7-93E6-D3FA6B2835E4}"/>
+              </a:ext>
+            </a:extLst>
+          </p:cNvPr>
+          <p:cNvPicPr>
+            <a:picLocks noChangeAspect="1" noChangeArrowheads="1"/>
+          </p:cNvPicPr>
+          <p:nvPr/>
+        </p:nvPicPr>
+        <p:blipFill>
+          <a:blip r:embed="rId2">
+            <a:extLst>
+              <a:ext uri="{28A0092B-C50C-407E-A947-70E740481C1C}">
+                <a14:useLocalDpi xmlns:a14="http://schemas.microsoft.com/office/drawing/2010/main" val="0"/>
+              </a:ext>
+            </a:extLst>
+          </a:blip>
+          <a:srcRect/>
+          <a:stretch>
+            <a:fillRect/>
+          </a:stretch>
+        </p:blipFill>
+        <p:spPr bwMode="auto">
+          <a:xfrm>
+            <a:off x="7974824" y="0"/>
+            <a:ext cx="4217176" cy="6858000"/>
+          </a:xfrm>
+          <a:prstGeom prst="rect">
+            <a:avLst/>
+          </a:prstGeom>
+          <a:noFill/>
+          <a:extLst>
+            <a:ext uri="{909E8E84-426E-40DD-AFC4-6F175D3DCCD1}">
+              <a14:hiddenFill xmlns:a14="http://schemas.microsoft.com/office/drawing/2010/main">
+                <a:solidFill>
+                  <a:srgbClr val="FFFFFF"/>
+                </a:solidFill>
+              </a14:hiddenFill>
+            </a:ext>
+          </a:extLst>
+        </p:spPr>
+      </p:pic>
+      <p:sp>
+        <p:nvSpPr>
+          <p:cNvPr id="2" name="Cím 1">
+            <a:extLst>
+              <a:ext uri="{FF2B5EF4-FFF2-40B4-BE49-F238E27FC236}">
+                <a16:creationId xmlns:a16="http://schemas.microsoft.com/office/drawing/2014/main" id="{CF803A75-62A4-49F1-8A78-908588E1EC86}"/>
+              </a:ext>
+            </a:extLst>
+          </p:cNvPr>
+          <p:cNvSpPr>
+            <a:spLocks noGrp="1"/>
+          </p:cNvSpPr>
+          <p:nvPr>
+            <p:ph type="title"/>
+          </p:nvPr>
+        </p:nvSpPr>
+        <p:spPr/>
+        <p:txBody>
+          <a:bodyPr/>
+          <a:lstStyle/>
+          <a:p>
+            <a:endParaRPr lang="hu-HU"/>
+          </a:p>
+        </p:txBody>
+      </p:sp>
+      <p:sp>
+        <p:nvSpPr>
+          <p:cNvPr id="3" name="Tartalom helye 2">
+            <a:extLst>
+              <a:ext uri="{FF2B5EF4-FFF2-40B4-BE49-F238E27FC236}">
+                <a16:creationId xmlns:a16="http://schemas.microsoft.com/office/drawing/2014/main" id="{AFC857CB-A6A5-47EC-A2F2-1E607F646B36}"/>
+              </a:ext>
+            </a:extLst>
+          </p:cNvPr>
+          <p:cNvSpPr>
+            <a:spLocks noGrp="1"/>
+          </p:cNvSpPr>
+          <p:nvPr>
+            <p:ph idx="1"/>
+          </p:nvPr>
+        </p:nvSpPr>
+        <p:spPr/>
+        <p:txBody>
+          <a:bodyPr/>
+          <a:lstStyle/>
+          <a:p>
+            <a:endParaRPr lang="hu-HU"/>
+          </a:p>
+        </p:txBody>
+      </p:sp>
+      <p:pic>
+        <p:nvPicPr>
+          <p:cNvPr id="5" name="Kép 4">
+            <a:extLst>
+              <a:ext uri="{FF2B5EF4-FFF2-40B4-BE49-F238E27FC236}">
+                <a16:creationId xmlns:a16="http://schemas.microsoft.com/office/drawing/2014/main" id="{F58D75A3-F81C-4E45-B67E-ABD7649BFC3F}"/>
+              </a:ext>
+            </a:extLst>
+          </p:cNvPr>
+          <p:cNvPicPr>
+            <a:picLocks noChangeAspect="1"/>
+          </p:cNvPicPr>
+          <p:nvPr/>
+        </p:nvPicPr>
+        <p:blipFill>
+          <a:blip r:embed="rId3"/>
+          <a:stretch>
+            <a:fillRect/>
+          </a:stretch>
+        </p:blipFill>
+        <p:spPr>
+          <a:xfrm>
+            <a:off x="0" y="0"/>
+            <a:ext cx="7974824" cy="6858000"/>
+          </a:xfrm>
+          <a:prstGeom prst="rect">
+            <a:avLst/>
+          </a:prstGeom>
+        </p:spPr>
+      </p:pic>
+      <p:pic>
+        <p:nvPicPr>
+          <p:cNvPr id="7" name="Kép 6">
+            <a:extLst>
+              <a:ext uri="{FF2B5EF4-FFF2-40B4-BE49-F238E27FC236}">
+                <a16:creationId xmlns:a16="http://schemas.microsoft.com/office/drawing/2014/main" id="{0C9BDEC0-642B-4846-B921-178329F28CFC}"/>
+              </a:ext>
+            </a:extLst>
+          </p:cNvPr>
+          <p:cNvPicPr>
+            <a:picLocks noChangeAspect="1"/>
+          </p:cNvPicPr>
+          <p:nvPr/>
+        </p:nvPicPr>
+        <p:blipFill>
+          <a:blip r:embed="rId4"/>
+          <a:stretch>
+            <a:fillRect/>
+          </a:stretch>
+        </p:blipFill>
+        <p:spPr>
+          <a:xfrm>
+            <a:off x="345057" y="5690571"/>
+            <a:ext cx="31158510" cy="213049"/>
+          </a:xfrm>
+          <a:prstGeom prst="rect">
+            <a:avLst/>
+          </a:prstGeom>
+        </p:spPr>
+      </p:pic>
+    </p:spTree>
+    <p:extLst>
+      <p:ext uri="{BB962C8B-B14F-4D97-AF65-F5344CB8AC3E}">
+        <p14:creationId xmlns:p14="http://schemas.microsoft.com/office/powerpoint/2010/main" val="2129761442"/>
+      </p:ext>
+    </p:extLst>
+  </p:cSld>
+  <p:clrMapOvr>
+    <a:masterClrMapping/>
+  </p:clrMapOvr>
+  <mc:AlternateContent xmlns:mc="http://schemas.openxmlformats.org/markup-compatibility/2006">
+    <mc:Choice xmlns:p159="http://schemas.microsoft.com/office/powerpoint/2015/09/main" Requires="p159">
+      <p:transition xmlns:p14="http://schemas.microsoft.com/office/powerpoint/2010/main" spd="slow" p14:dur="2000">
+        <p159:morph option="byObject"/>
+      </p:transition>
+    </mc:Choice>
+    <mc:Fallback>
+      <p:transition spd="slow">
+        <p:fade/>
+      </p:transition>
+    </mc:Fallback>
+  </mc:AlternateContent>
+</p:sld>
+</file>
+
+<file path=ppt/slides/slide7.xml><?xml version="1.0" encoding="utf-8"?>
+<p:sld xmlns:a="http://schemas.openxmlformats.org/drawingml/2006/main" xmlns:r="http://schemas.openxmlformats.org/officeDocument/2006/relationships" xmlns:p="http://schemas.openxmlformats.org/presentationml/2006/main">
+  <p:cSld>
+    <p:spTree>
+      <p:nvGrpSpPr>
+        <p:cNvPr id="1" name=""/>
+        <p:cNvGrpSpPr/>
+        <p:nvPr/>
+      </p:nvGrpSpPr>
+      <p:grpSpPr>
+        <a:xfrm>
+          <a:off x="0" y="0"/>
+          <a:ext cx="0" cy="0"/>
+          <a:chOff x="0" y="0"/>
+          <a:chExt cx="0" cy="0"/>
+        </a:xfrm>
+      </p:grpSpPr>
+      <p:pic>
+        <p:nvPicPr>
+          <p:cNvPr id="1026" name="Picture 2" descr="Panko | Cats of the Web">
+            <a:extLst>
+              <a:ext uri="{FF2B5EF4-FFF2-40B4-BE49-F238E27FC236}">
+                <a16:creationId xmlns:a16="http://schemas.microsoft.com/office/drawing/2014/main" id="{6A84D3BA-3FDD-4361-A87F-1A59CE9A4FC8}"/>
+              </a:ext>
+            </a:extLst>
+          </p:cNvPr>
+          <p:cNvPicPr>
+            <a:picLocks noChangeAspect="1" noChangeArrowheads="1"/>
+          </p:cNvPicPr>
+          <p:nvPr/>
+        </p:nvPicPr>
+        <p:blipFill>
+          <a:blip r:embed="rId2">
+            <a:extLst>
+              <a:ext uri="{28A0092B-C50C-407E-A947-70E740481C1C}">
+                <a14:useLocalDpi xmlns:a14="http://schemas.microsoft.com/office/drawing/2010/main" val="0"/>
+              </a:ext>
+            </a:extLst>
+          </a:blip>
+          <a:srcRect/>
+          <a:stretch>
+            <a:fillRect/>
+          </a:stretch>
+        </p:blipFill>
+        <p:spPr bwMode="auto">
+          <a:xfrm>
+            <a:off x="7974824" y="0"/>
+            <a:ext cx="4217176" cy="6858000"/>
+          </a:xfrm>
+          <a:prstGeom prst="rect">
+            <a:avLst/>
+          </a:prstGeom>
+          <a:noFill/>
+          <a:extLst>
+            <a:ext uri="{909E8E84-426E-40DD-AFC4-6F175D3DCCD1}">
+              <a14:hiddenFill xmlns:a14="http://schemas.microsoft.com/office/drawing/2010/main">
+                <a:solidFill>
+                  <a:srgbClr val="FFFFFF"/>
+                </a:solidFill>
+              </a14:hiddenFill>
+            </a:ext>
+          </a:extLst>
+        </p:spPr>
+      </p:pic>
+      <p:sp>
+        <p:nvSpPr>
+          <p:cNvPr id="2" name="Cím 1">
+            <a:extLst>
+              <a:ext uri="{FF2B5EF4-FFF2-40B4-BE49-F238E27FC236}">
+                <a16:creationId xmlns:a16="http://schemas.microsoft.com/office/drawing/2014/main" id="{CF803A75-62A4-49F1-8A78-908588E1EC86}"/>
+              </a:ext>
+            </a:extLst>
+          </p:cNvPr>
+          <p:cNvSpPr>
+            <a:spLocks noGrp="1"/>
+          </p:cNvSpPr>
+          <p:nvPr>
+            <p:ph type="title"/>
+          </p:nvPr>
+        </p:nvSpPr>
+        <p:spPr/>
+        <p:txBody>
+          <a:bodyPr/>
+          <a:lstStyle/>
+          <a:p>
+            <a:endParaRPr lang="hu-HU"/>
+          </a:p>
+        </p:txBody>
+      </p:sp>
+      <p:sp>
+        <p:nvSpPr>
+          <p:cNvPr id="3" name="Tartalom helye 2">
+            <a:extLst>
+              <a:ext uri="{FF2B5EF4-FFF2-40B4-BE49-F238E27FC236}">
+                <a16:creationId xmlns:a16="http://schemas.microsoft.com/office/drawing/2014/main" id="{AFC857CB-A6A5-47EC-A2F2-1E607F646B36}"/>
+              </a:ext>
+            </a:extLst>
+          </p:cNvPr>
+          <p:cNvSpPr>
+            <a:spLocks noGrp="1"/>
+          </p:cNvSpPr>
+          <p:nvPr>
+            <p:ph idx="1"/>
+          </p:nvPr>
+        </p:nvSpPr>
+        <p:spPr/>
+        <p:txBody>
+          <a:bodyPr/>
+          <a:lstStyle/>
+          <a:p>
+            <a:endParaRPr lang="hu-HU"/>
+          </a:p>
+        </p:txBody>
+      </p:sp>
+      <p:pic>
+        <p:nvPicPr>
+          <p:cNvPr id="5" name="Kép 4">
+            <a:extLst>
+              <a:ext uri="{FF2B5EF4-FFF2-40B4-BE49-F238E27FC236}">
+                <a16:creationId xmlns:a16="http://schemas.microsoft.com/office/drawing/2014/main" id="{F58D75A3-F81C-4E45-B67E-ABD7649BFC3F}"/>
+              </a:ext>
+            </a:extLst>
+          </p:cNvPr>
+          <p:cNvPicPr>
+            <a:picLocks noChangeAspect="1"/>
+          </p:cNvPicPr>
+          <p:nvPr/>
+        </p:nvPicPr>
+        <p:blipFill>
+          <a:blip r:embed="rId3"/>
+          <a:stretch>
+            <a:fillRect/>
+          </a:stretch>
+        </p:blipFill>
+        <p:spPr>
+          <a:xfrm>
+            <a:off x="0" y="0"/>
+            <a:ext cx="7974824" cy="6858000"/>
+          </a:xfrm>
+          <a:prstGeom prst="rect">
+            <a:avLst/>
+          </a:prstGeom>
+        </p:spPr>
+      </p:pic>
+      <p:pic>
+        <p:nvPicPr>
+          <p:cNvPr id="7" name="Kép 6">
+            <a:extLst>
+              <a:ext uri="{FF2B5EF4-FFF2-40B4-BE49-F238E27FC236}">
+                <a16:creationId xmlns:a16="http://schemas.microsoft.com/office/drawing/2014/main" id="{0C9BDEC0-642B-4846-B921-178329F28CFC}"/>
+              </a:ext>
+            </a:extLst>
+          </p:cNvPr>
+          <p:cNvPicPr>
+            <a:picLocks noChangeAspect="1"/>
+          </p:cNvPicPr>
+          <p:nvPr/>
+        </p:nvPicPr>
+        <p:blipFill>
+          <a:blip r:embed="rId4"/>
+          <a:stretch>
+            <a:fillRect/>
+          </a:stretch>
+        </p:blipFill>
+        <p:spPr>
+          <a:xfrm>
+            <a:off x="-23183686" y="5733703"/>
+            <a:ext cx="31158510" cy="213049"/>
+          </a:xfrm>
+          <a:prstGeom prst="rect">
+            <a:avLst/>
+          </a:prstGeom>
+        </p:spPr>
+      </p:pic>
+    </p:spTree>
+    <p:extLst>
+      <p:ext uri="{BB962C8B-B14F-4D97-AF65-F5344CB8AC3E}">
+        <p14:creationId xmlns:p14="http://schemas.microsoft.com/office/powerpoint/2010/main" val="3589421342"/>
+      </p:ext>
+    </p:extLst>
+  </p:cSld>
+  <p:clrMapOvr>
+    <a:masterClrMapping/>
+  </p:clrMapOvr>
+  <mc:AlternateContent xmlns:mc="http://schemas.openxmlformats.org/markup-compatibility/2006">
+    <mc:Choice xmlns:p159="http://schemas.microsoft.com/office/powerpoint/2015/09/main" Requires="p159">
+      <p:transition xmlns:p14="http://schemas.microsoft.com/office/powerpoint/2010/main" spd="slow" p14:dur="10000">
+        <p159:morph option="byObject"/>
+      </p:transition>
+    </mc:Choice>
+    <mc:Fallback>
+      <p:transition spd="slow">
+        <p:fade/>
+      </p:transition>
+    </mc:Fallback>
+  </mc:AlternateContent>
+</p:sld>
+</file>
+
+<file path=ppt/slides/slide8.xml><?xml version="1.0" encoding="utf-8"?>
 <p:sld xmlns:a="http://schemas.openxmlformats.org/drawingml/2006/main" xmlns:r="http://schemas.openxmlformats.org/officeDocument/2006/relationships" xmlns:p="http://schemas.openxmlformats.org/presentationml/2006/main">
   <p:cSld>
     <p:spTree>
@@ -4550,7 +6019,7 @@
 </p:sld>
 </file>
 
-<file path=ppt/slides/slide6.xml><?xml version="1.0" encoding="utf-8"?>
+<file path=ppt/slides/slide9.xml><?xml version="1.0" encoding="utf-8"?>
 <p:sld xmlns:a="http://schemas.openxmlformats.org/drawingml/2006/main" xmlns:r="http://schemas.openxmlformats.org/officeDocument/2006/relationships" xmlns:p="http://schemas.openxmlformats.org/presentationml/2006/main">
   <p:cSld>
     <p:spTree>
@@ -4831,846 +6300,6 @@
     <p:extLst>
       <p:ext uri="{BB962C8B-B14F-4D97-AF65-F5344CB8AC3E}">
         <p14:creationId xmlns:p14="http://schemas.microsoft.com/office/powerpoint/2010/main" val="833957318"/>
-      </p:ext>
-    </p:extLst>
-  </p:cSld>
-  <p:clrMapOvr>
-    <a:masterClrMapping/>
-  </p:clrMapOvr>
-</p:sld>
-</file>
-
-<file path=ppt/slides/slide7.xml><?xml version="1.0" encoding="utf-8"?>
-<p:sld xmlns:a="http://schemas.openxmlformats.org/drawingml/2006/main" xmlns:r="http://schemas.openxmlformats.org/officeDocument/2006/relationships" xmlns:p="http://schemas.openxmlformats.org/presentationml/2006/main">
-  <p:cSld>
-    <p:spTree>
-      <p:nvGrpSpPr>
-        <p:cNvPr id="1" name=""/>
-        <p:cNvGrpSpPr/>
-        <p:nvPr/>
-      </p:nvGrpSpPr>
-      <p:grpSpPr>
-        <a:xfrm>
-          <a:off x="0" y="0"/>
-          <a:ext cx="0" cy="0"/>
-          <a:chOff x="0" y="0"/>
-          <a:chExt cx="0" cy="0"/>
-        </a:xfrm>
-      </p:grpSpPr>
-      <p:sp>
-        <p:nvSpPr>
-          <p:cNvPr id="2" name="Cím 1">
-            <a:extLst>
-              <a:ext uri="{FF2B5EF4-FFF2-40B4-BE49-F238E27FC236}">
-                <a16:creationId xmlns:a16="http://schemas.microsoft.com/office/drawing/2014/main" id="{D99C8C30-B780-10C0-97A7-F93678B1352E}"/>
-              </a:ext>
-            </a:extLst>
-          </p:cNvPr>
-          <p:cNvSpPr>
-            <a:spLocks noGrp="1"/>
-          </p:cNvSpPr>
-          <p:nvPr>
-            <p:ph type="title"/>
-          </p:nvPr>
-        </p:nvSpPr>
-        <p:spPr/>
-        <p:txBody>
-          <a:bodyPr/>
-          <a:lstStyle/>
-          <a:p>
-            <a:endParaRPr lang="hu-HU"/>
-          </a:p>
-        </p:txBody>
-      </p:sp>
-      <p:sp>
-        <p:nvSpPr>
-          <p:cNvPr id="3" name="Tartalom helye 2">
-            <a:extLst>
-              <a:ext uri="{FF2B5EF4-FFF2-40B4-BE49-F238E27FC236}">
-                <a16:creationId xmlns:a16="http://schemas.microsoft.com/office/drawing/2014/main" id="{9955BABC-FFFE-9D48-4184-83745BD1BA50}"/>
-              </a:ext>
-            </a:extLst>
-          </p:cNvPr>
-          <p:cNvSpPr>
-            <a:spLocks noGrp="1"/>
-          </p:cNvSpPr>
-          <p:nvPr>
-            <p:ph idx="1"/>
-          </p:nvPr>
-        </p:nvSpPr>
-        <p:spPr/>
-        <p:txBody>
-          <a:bodyPr/>
-          <a:lstStyle/>
-          <a:p>
-            <a:endParaRPr lang="hu-HU"/>
-          </a:p>
-        </p:txBody>
-      </p:sp>
-      <p:pic>
-        <p:nvPicPr>
-          <p:cNvPr id="5" name="Kép 4">
-            <a:extLst>
-              <a:ext uri="{FF2B5EF4-FFF2-40B4-BE49-F238E27FC236}">
-                <a16:creationId xmlns:a16="http://schemas.microsoft.com/office/drawing/2014/main" id="{54AB7258-3515-925D-877D-106D81FB2A61}"/>
-              </a:ext>
-            </a:extLst>
-          </p:cNvPr>
-          <p:cNvPicPr>
-            <a:picLocks noChangeAspect="1"/>
-          </p:cNvPicPr>
-          <p:nvPr/>
-        </p:nvPicPr>
-        <p:blipFill>
-          <a:blip r:embed="rId2"/>
-          <a:stretch>
-            <a:fillRect/>
-          </a:stretch>
-        </p:blipFill>
-        <p:spPr>
-          <a:xfrm>
-            <a:off x="0" y="0"/>
-            <a:ext cx="12192000" cy="6858000"/>
-          </a:xfrm>
-          <a:prstGeom prst="rect">
-            <a:avLst/>
-          </a:prstGeom>
-        </p:spPr>
-      </p:pic>
-      <p:pic>
-        <p:nvPicPr>
-          <p:cNvPr id="8" name="Kép 7">
-            <a:extLst>
-              <a:ext uri="{FF2B5EF4-FFF2-40B4-BE49-F238E27FC236}">
-                <a16:creationId xmlns:a16="http://schemas.microsoft.com/office/drawing/2014/main" id="{8E2C9792-9310-C7DF-D559-28936D573BB3}"/>
-              </a:ext>
-            </a:extLst>
-          </p:cNvPr>
-          <p:cNvPicPr>
-            <a:picLocks noChangeAspect="1"/>
-          </p:cNvPicPr>
-          <p:nvPr/>
-        </p:nvPicPr>
-        <p:blipFill>
-          <a:blip r:embed="rId3"/>
-          <a:stretch>
-            <a:fillRect/>
-          </a:stretch>
-        </p:blipFill>
-        <p:spPr>
-          <a:xfrm>
-            <a:off x="0" y="160462"/>
-            <a:ext cx="12192000" cy="6697538"/>
-          </a:xfrm>
-          <a:prstGeom prst="rect">
-            <a:avLst/>
-          </a:prstGeom>
-        </p:spPr>
-      </p:pic>
-      <p:sp>
-        <p:nvSpPr>
-          <p:cNvPr id="4" name="Téglalap 3">
-            <a:extLst>
-              <a:ext uri="{FF2B5EF4-FFF2-40B4-BE49-F238E27FC236}">
-                <a16:creationId xmlns:a16="http://schemas.microsoft.com/office/drawing/2014/main" id="{E96C047D-3CA9-AD97-30DD-DC53D6065607}"/>
-              </a:ext>
-            </a:extLst>
-          </p:cNvPr>
-          <p:cNvSpPr/>
-          <p:nvPr/>
-        </p:nvSpPr>
-        <p:spPr>
-          <a:xfrm rot="5400000">
-            <a:off x="-1205916" y="1205916"/>
-            <a:ext cx="6858000" cy="4446168"/>
-          </a:xfrm>
-          <a:prstGeom prst="rect">
-            <a:avLst/>
-          </a:prstGeom>
-          <a:gradFill flip="none" rotWithShape="1">
-            <a:gsLst>
-              <a:gs pos="0">
-                <a:schemeClr val="accent6">
-                  <a:lumMod val="67000"/>
-                </a:schemeClr>
-              </a:gs>
-              <a:gs pos="48000">
-                <a:schemeClr val="accent6">
-                  <a:lumMod val="97000"/>
-                  <a:lumOff val="3000"/>
-                </a:schemeClr>
-              </a:gs>
-              <a:gs pos="100000">
-                <a:schemeClr val="accent6">
-                  <a:lumMod val="60000"/>
-                  <a:lumOff val="40000"/>
-                </a:schemeClr>
-              </a:gs>
-            </a:gsLst>
-            <a:lin ang="16200000" scaled="1"/>
-            <a:tileRect/>
-          </a:gradFill>
-          <a:ln>
-            <a:noFill/>
-          </a:ln>
-        </p:spPr>
-        <p:style>
-          <a:lnRef idx="0">
-            <a:scrgbClr r="0" g="0" b="0"/>
-          </a:lnRef>
-          <a:fillRef idx="0">
-            <a:scrgbClr r="0" g="0" b="0"/>
-          </a:fillRef>
-          <a:effectRef idx="0">
-            <a:scrgbClr r="0" g="0" b="0"/>
-          </a:effectRef>
-          <a:fontRef idx="minor">
-            <a:schemeClr val="lt1"/>
-          </a:fontRef>
-        </p:style>
-        <p:txBody>
-          <a:bodyPr rtlCol="0" anchor="ctr"/>
-          <a:lstStyle/>
-          <a:p>
-            <a:pPr algn="ctr"/>
-            <a:endParaRPr lang="hu-HU"/>
-          </a:p>
-        </p:txBody>
-      </p:sp>
-      <p:sp>
-        <p:nvSpPr>
-          <p:cNvPr id="6" name="Szövegdoboz 5">
-            <a:extLst>
-              <a:ext uri="{FF2B5EF4-FFF2-40B4-BE49-F238E27FC236}">
-                <a16:creationId xmlns:a16="http://schemas.microsoft.com/office/drawing/2014/main" id="{3B9BE9C7-AE59-99C2-2E6E-9F4F92BA1495}"/>
-              </a:ext>
-            </a:extLst>
-          </p:cNvPr>
-          <p:cNvSpPr txBox="1"/>
-          <p:nvPr/>
-        </p:nvSpPr>
-        <p:spPr>
-          <a:xfrm>
-            <a:off x="163587" y="797510"/>
-            <a:ext cx="4118994" cy="5262979"/>
-          </a:xfrm>
-          <a:prstGeom prst="rect">
-            <a:avLst/>
-          </a:prstGeom>
-          <a:noFill/>
-        </p:spPr>
-        <p:txBody>
-          <a:bodyPr wrap="square" rtlCol="0">
-            <a:spAutoFit/>
-          </a:bodyPr>
-          <a:lstStyle/>
-          <a:p>
-            <a:r>
-              <a:rPr lang="hu-HU" sz="2800" b="1" dirty="0">
-                <a:solidFill>
-                  <a:schemeClr val="bg1"/>
-                </a:solidFill>
-                <a:latin typeface="system-ui"/>
-              </a:rPr>
-              <a:t>A profil felület.</a:t>
-            </a:r>
-          </a:p>
-          <a:p>
-            <a:endParaRPr lang="hu-HU" sz="2800" b="1" dirty="0">
-              <a:solidFill>
-                <a:schemeClr val="bg1"/>
-              </a:solidFill>
-              <a:latin typeface="system-ui"/>
-            </a:endParaRPr>
-          </a:p>
-          <a:p>
-            <a:r>
-              <a:rPr lang="hu-HU" sz="2800" b="1" dirty="0">
-                <a:solidFill>
-                  <a:schemeClr val="bg1"/>
-                </a:solidFill>
-                <a:latin typeface="system-ui"/>
-              </a:rPr>
-              <a:t>Itt tud a felhasználó a fiókjával kapcsolatos  intézkedéseket figyelni.</a:t>
-            </a:r>
-          </a:p>
-          <a:p>
-            <a:endParaRPr lang="hu-HU" sz="2800" b="1" dirty="0">
-              <a:solidFill>
-                <a:schemeClr val="bg1"/>
-              </a:solidFill>
-              <a:latin typeface="system-ui"/>
-            </a:endParaRPr>
-          </a:p>
-          <a:p>
-            <a:r>
-              <a:rPr lang="hu-HU" sz="2800" b="1" dirty="0">
-                <a:solidFill>
-                  <a:schemeClr val="bg1"/>
-                </a:solidFill>
-                <a:latin typeface="system-ui"/>
-              </a:rPr>
-              <a:t>Tud nevet váltani vagy </a:t>
-            </a:r>
-            <a:r>
-              <a:rPr lang="hu-HU" sz="2800" b="1" dirty="0" err="1">
-                <a:solidFill>
-                  <a:schemeClr val="bg1"/>
-                </a:solidFill>
-                <a:latin typeface="system-ui"/>
-              </a:rPr>
-              <a:t>jelszavat</a:t>
-            </a:r>
-            <a:r>
-              <a:rPr lang="hu-HU" sz="2800" b="1" dirty="0">
-                <a:solidFill>
-                  <a:schemeClr val="bg1"/>
-                </a:solidFill>
-                <a:latin typeface="system-ui"/>
-              </a:rPr>
-              <a:t> váltani, ha szükségére esik.</a:t>
-            </a:r>
-          </a:p>
-          <a:p>
-            <a:endParaRPr lang="hu-HU" sz="2800" b="1" dirty="0">
-              <a:solidFill>
-                <a:schemeClr val="bg1"/>
-              </a:solidFill>
-              <a:latin typeface="system-ui"/>
-            </a:endParaRPr>
-          </a:p>
-          <a:p>
-            <a:r>
-              <a:rPr lang="hu-HU" sz="2800" b="1" dirty="0">
-                <a:solidFill>
-                  <a:schemeClr val="bg1"/>
-                </a:solidFill>
-                <a:latin typeface="system-ui"/>
-              </a:rPr>
-              <a:t>Ki tud jelentkezni ha befejezte a vásárlást.</a:t>
-            </a:r>
-          </a:p>
-        </p:txBody>
-      </p:sp>
-    </p:spTree>
-    <p:extLst>
-      <p:ext uri="{BB962C8B-B14F-4D97-AF65-F5344CB8AC3E}">
-        <p14:creationId xmlns:p14="http://schemas.microsoft.com/office/powerpoint/2010/main" val="3135840362"/>
-      </p:ext>
-    </p:extLst>
-  </p:cSld>
-  <p:clrMapOvr>
-    <a:masterClrMapping/>
-  </p:clrMapOvr>
-</p:sld>
-</file>
-
-<file path=ppt/slides/slide8.xml><?xml version="1.0" encoding="utf-8"?>
-<p:sld xmlns:a="http://schemas.openxmlformats.org/drawingml/2006/main" xmlns:r="http://schemas.openxmlformats.org/officeDocument/2006/relationships" xmlns:p="http://schemas.openxmlformats.org/presentationml/2006/main">
-  <p:cSld>
-    <p:spTree>
-      <p:nvGrpSpPr>
-        <p:cNvPr id="1" name=""/>
-        <p:cNvGrpSpPr/>
-        <p:nvPr/>
-      </p:nvGrpSpPr>
-      <p:grpSpPr>
-        <a:xfrm>
-          <a:off x="0" y="0"/>
-          <a:ext cx="0" cy="0"/>
-          <a:chOff x="0" y="0"/>
-          <a:chExt cx="0" cy="0"/>
-        </a:xfrm>
-      </p:grpSpPr>
-      <p:sp>
-        <p:nvSpPr>
-          <p:cNvPr id="2" name="Cím 1">
-            <a:extLst>
-              <a:ext uri="{FF2B5EF4-FFF2-40B4-BE49-F238E27FC236}">
-                <a16:creationId xmlns:a16="http://schemas.microsoft.com/office/drawing/2014/main" id="{64266DAB-2D3B-6FB5-72DA-8E174C75C409}"/>
-              </a:ext>
-            </a:extLst>
-          </p:cNvPr>
-          <p:cNvSpPr>
-            <a:spLocks noGrp="1"/>
-          </p:cNvSpPr>
-          <p:nvPr>
-            <p:ph type="title"/>
-          </p:nvPr>
-        </p:nvSpPr>
-        <p:spPr/>
-        <p:txBody>
-          <a:bodyPr/>
-          <a:lstStyle/>
-          <a:p>
-            <a:endParaRPr lang="hu-HU" dirty="0"/>
-          </a:p>
-        </p:txBody>
-      </p:sp>
-      <p:sp>
-        <p:nvSpPr>
-          <p:cNvPr id="3" name="Tartalom helye 2">
-            <a:extLst>
-              <a:ext uri="{FF2B5EF4-FFF2-40B4-BE49-F238E27FC236}">
-                <a16:creationId xmlns:a16="http://schemas.microsoft.com/office/drawing/2014/main" id="{084767BD-0480-DC2D-1464-1CFA4F3C82A6}"/>
-              </a:ext>
-            </a:extLst>
-          </p:cNvPr>
-          <p:cNvSpPr>
-            <a:spLocks noGrp="1"/>
-          </p:cNvSpPr>
-          <p:nvPr>
-            <p:ph idx="1"/>
-          </p:nvPr>
-        </p:nvSpPr>
-        <p:spPr/>
-        <p:txBody>
-          <a:bodyPr/>
-          <a:lstStyle/>
-          <a:p>
-            <a:endParaRPr lang="hu-HU"/>
-          </a:p>
-        </p:txBody>
-      </p:sp>
-      <p:pic>
-        <p:nvPicPr>
-          <p:cNvPr id="5" name="Kép 4">
-            <a:extLst>
-              <a:ext uri="{FF2B5EF4-FFF2-40B4-BE49-F238E27FC236}">
-                <a16:creationId xmlns:a16="http://schemas.microsoft.com/office/drawing/2014/main" id="{0DEEBEA9-1DD1-A45F-DC7B-852EB64CC708}"/>
-              </a:ext>
-            </a:extLst>
-          </p:cNvPr>
-          <p:cNvPicPr>
-            <a:picLocks noChangeAspect="1"/>
-          </p:cNvPicPr>
-          <p:nvPr/>
-        </p:nvPicPr>
-        <p:blipFill>
-          <a:blip r:embed="rId2"/>
-          <a:stretch>
-            <a:fillRect/>
-          </a:stretch>
-        </p:blipFill>
-        <p:spPr>
-          <a:xfrm>
-            <a:off x="0" y="0"/>
-            <a:ext cx="12192000" cy="6858000"/>
-          </a:xfrm>
-          <a:prstGeom prst="rect">
-            <a:avLst/>
-          </a:prstGeom>
-        </p:spPr>
-      </p:pic>
-      <p:pic>
-        <p:nvPicPr>
-          <p:cNvPr id="7" name="Kép 6">
-            <a:extLst>
-              <a:ext uri="{FF2B5EF4-FFF2-40B4-BE49-F238E27FC236}">
-                <a16:creationId xmlns:a16="http://schemas.microsoft.com/office/drawing/2014/main" id="{76CBAC68-B49F-4137-8ABE-D9695E759B34}"/>
-              </a:ext>
-            </a:extLst>
-          </p:cNvPr>
-          <p:cNvPicPr>
-            <a:picLocks noChangeAspect="1"/>
-          </p:cNvPicPr>
-          <p:nvPr/>
-        </p:nvPicPr>
-        <p:blipFill>
-          <a:blip r:embed="rId3"/>
-          <a:stretch>
-            <a:fillRect/>
-          </a:stretch>
-        </p:blipFill>
-        <p:spPr>
-          <a:xfrm>
-            <a:off x="3471508" y="533378"/>
-            <a:ext cx="5077534" cy="419121"/>
-          </a:xfrm>
-          <a:prstGeom prst="rect">
-            <a:avLst/>
-          </a:prstGeom>
-        </p:spPr>
-      </p:pic>
-      <p:sp>
-        <p:nvSpPr>
-          <p:cNvPr id="4" name="Téglalap 3">
-            <a:extLst>
-              <a:ext uri="{FF2B5EF4-FFF2-40B4-BE49-F238E27FC236}">
-                <a16:creationId xmlns:a16="http://schemas.microsoft.com/office/drawing/2014/main" id="{6FFCED1D-1BCA-ED75-DE7D-7C26070D8CD4}"/>
-              </a:ext>
-            </a:extLst>
-          </p:cNvPr>
-          <p:cNvSpPr/>
-          <p:nvPr/>
-        </p:nvSpPr>
-        <p:spPr>
-          <a:xfrm rot="5400000">
-            <a:off x="-1205916" y="1205916"/>
-            <a:ext cx="6858000" cy="4446168"/>
-          </a:xfrm>
-          <a:prstGeom prst="rect">
-            <a:avLst/>
-          </a:prstGeom>
-          <a:gradFill flip="none" rotWithShape="1">
-            <a:gsLst>
-              <a:gs pos="0">
-                <a:schemeClr val="accent6">
-                  <a:lumMod val="67000"/>
-                </a:schemeClr>
-              </a:gs>
-              <a:gs pos="48000">
-                <a:schemeClr val="accent6">
-                  <a:lumMod val="97000"/>
-                  <a:lumOff val="3000"/>
-                </a:schemeClr>
-              </a:gs>
-              <a:gs pos="100000">
-                <a:schemeClr val="accent6">
-                  <a:lumMod val="60000"/>
-                  <a:lumOff val="40000"/>
-                </a:schemeClr>
-              </a:gs>
-            </a:gsLst>
-            <a:lin ang="16200000" scaled="1"/>
-            <a:tileRect/>
-          </a:gradFill>
-          <a:ln>
-            <a:noFill/>
-          </a:ln>
-        </p:spPr>
-        <p:style>
-          <a:lnRef idx="0">
-            <a:scrgbClr r="0" g="0" b="0"/>
-          </a:lnRef>
-          <a:fillRef idx="0">
-            <a:scrgbClr r="0" g="0" b="0"/>
-          </a:fillRef>
-          <a:effectRef idx="0">
-            <a:scrgbClr r="0" g="0" b="0"/>
-          </a:effectRef>
-          <a:fontRef idx="minor">
-            <a:schemeClr val="lt1"/>
-          </a:fontRef>
-        </p:style>
-        <p:txBody>
-          <a:bodyPr rtlCol="0" anchor="ctr"/>
-          <a:lstStyle/>
-          <a:p>
-            <a:pPr algn="ctr"/>
-            <a:endParaRPr lang="hu-HU"/>
-          </a:p>
-        </p:txBody>
-      </p:sp>
-      <p:sp>
-        <p:nvSpPr>
-          <p:cNvPr id="6" name="Szövegdoboz 5">
-            <a:extLst>
-              <a:ext uri="{FF2B5EF4-FFF2-40B4-BE49-F238E27FC236}">
-                <a16:creationId xmlns:a16="http://schemas.microsoft.com/office/drawing/2014/main" id="{F10B5774-A644-10B9-9978-B4607EFC5ADF}"/>
-              </a:ext>
-            </a:extLst>
-          </p:cNvPr>
-          <p:cNvSpPr txBox="1"/>
-          <p:nvPr/>
-        </p:nvSpPr>
-        <p:spPr>
-          <a:xfrm>
-            <a:off x="163587" y="582067"/>
-            <a:ext cx="4118994" cy="5693866"/>
-          </a:xfrm>
-          <a:prstGeom prst="rect">
-            <a:avLst/>
-          </a:prstGeom>
-          <a:noFill/>
-        </p:spPr>
-        <p:txBody>
-          <a:bodyPr wrap="square" rtlCol="0">
-            <a:spAutoFit/>
-          </a:bodyPr>
-          <a:lstStyle/>
-          <a:p>
-            <a:r>
-              <a:rPr lang="hu-HU" sz="2800" b="1" dirty="0">
-                <a:solidFill>
-                  <a:schemeClr val="bg1"/>
-                </a:solidFill>
-                <a:latin typeface="system-ui"/>
-              </a:rPr>
-              <a:t>Az eladás felület.</a:t>
-            </a:r>
-          </a:p>
-          <a:p>
-            <a:endParaRPr lang="hu-HU" sz="2800" b="1" dirty="0">
-              <a:solidFill>
-                <a:schemeClr val="bg1"/>
-              </a:solidFill>
-              <a:latin typeface="system-ui"/>
-            </a:endParaRPr>
-          </a:p>
-          <a:p>
-            <a:r>
-              <a:rPr lang="hu-HU" sz="2800" b="1" dirty="0">
-                <a:solidFill>
-                  <a:schemeClr val="bg1"/>
-                </a:solidFill>
-                <a:latin typeface="system-ui"/>
-              </a:rPr>
-              <a:t>Itt tud a felhasználó feltölteni eladásra kívánt terméket.</a:t>
-            </a:r>
-          </a:p>
-          <a:p>
-            <a:endParaRPr lang="hu-HU" sz="2800" b="1" dirty="0">
-              <a:solidFill>
-                <a:schemeClr val="bg1"/>
-              </a:solidFill>
-              <a:latin typeface="system-ui"/>
-            </a:endParaRPr>
-          </a:p>
-          <a:p>
-            <a:r>
-              <a:rPr lang="hu-HU" sz="2800" b="1" dirty="0">
-                <a:solidFill>
-                  <a:schemeClr val="bg1"/>
-                </a:solidFill>
-                <a:latin typeface="system-ui"/>
-              </a:rPr>
-              <a:t>A kategória felület megmutatja az összes kategóriát a rendszerben.</a:t>
-            </a:r>
-          </a:p>
-          <a:p>
-            <a:endParaRPr lang="hu-HU" sz="2800" b="1" dirty="0">
-              <a:solidFill>
-                <a:schemeClr val="bg1"/>
-              </a:solidFill>
-              <a:latin typeface="system-ui"/>
-            </a:endParaRPr>
-          </a:p>
-          <a:p>
-            <a:r>
-              <a:rPr lang="hu-HU" sz="2800" b="1" dirty="0">
-                <a:solidFill>
-                  <a:schemeClr val="bg1"/>
-                </a:solidFill>
-                <a:latin typeface="system-ui"/>
-              </a:rPr>
-              <a:t>Feltöltés után bekerül az adatbázisba és felkerül az</a:t>
-            </a:r>
-          </a:p>
-          <a:p>
-            <a:r>
-              <a:rPr lang="hu-HU" sz="2800" b="1" dirty="0">
-                <a:solidFill>
-                  <a:schemeClr val="bg1"/>
-                </a:solidFill>
-                <a:latin typeface="system-ui"/>
-              </a:rPr>
-              <a:t>oldalunkra.</a:t>
-            </a:r>
-          </a:p>
-        </p:txBody>
-      </p:sp>
-    </p:spTree>
-    <p:extLst>
-      <p:ext uri="{BB962C8B-B14F-4D97-AF65-F5344CB8AC3E}">
-        <p14:creationId xmlns:p14="http://schemas.microsoft.com/office/powerpoint/2010/main" val="2229886032"/>
-      </p:ext>
-    </p:extLst>
-  </p:cSld>
-  <p:clrMapOvr>
-    <a:masterClrMapping/>
-  </p:clrMapOvr>
-</p:sld>
-</file>
-
-<file path=ppt/slides/slide9.xml><?xml version="1.0" encoding="utf-8"?>
-<p:sld xmlns:a="http://schemas.openxmlformats.org/drawingml/2006/main" xmlns:r="http://schemas.openxmlformats.org/officeDocument/2006/relationships" xmlns:p="http://schemas.openxmlformats.org/presentationml/2006/main">
-  <p:cSld>
-    <p:spTree>
-      <p:nvGrpSpPr>
-        <p:cNvPr id="1" name=""/>
-        <p:cNvGrpSpPr/>
-        <p:nvPr/>
-      </p:nvGrpSpPr>
-      <p:grpSpPr>
-        <a:xfrm>
-          <a:off x="0" y="0"/>
-          <a:ext cx="0" cy="0"/>
-          <a:chOff x="0" y="0"/>
-          <a:chExt cx="0" cy="0"/>
-        </a:xfrm>
-      </p:grpSpPr>
-      <p:sp>
-        <p:nvSpPr>
-          <p:cNvPr id="2" name="Cím 1">
-            <a:extLst>
-              <a:ext uri="{FF2B5EF4-FFF2-40B4-BE49-F238E27FC236}">
-                <a16:creationId xmlns:a16="http://schemas.microsoft.com/office/drawing/2014/main" id="{88F078C4-315D-F60E-2514-AD927602C475}"/>
-              </a:ext>
-            </a:extLst>
-          </p:cNvPr>
-          <p:cNvSpPr>
-            <a:spLocks noGrp="1"/>
-          </p:cNvSpPr>
-          <p:nvPr>
-            <p:ph type="ctrTitle"/>
-          </p:nvPr>
-        </p:nvSpPr>
-        <p:spPr/>
-        <p:txBody>
-          <a:bodyPr/>
-          <a:lstStyle/>
-          <a:p>
-            <a:endParaRPr lang="hu-HU"/>
-          </a:p>
-        </p:txBody>
-      </p:sp>
-      <p:sp>
-        <p:nvSpPr>
-          <p:cNvPr id="3" name="Alcím 2">
-            <a:extLst>
-              <a:ext uri="{FF2B5EF4-FFF2-40B4-BE49-F238E27FC236}">
-                <a16:creationId xmlns:a16="http://schemas.microsoft.com/office/drawing/2014/main" id="{570A3EA4-E102-D797-4CC6-8166CFFA43EE}"/>
-              </a:ext>
-            </a:extLst>
-          </p:cNvPr>
-          <p:cNvSpPr>
-            <a:spLocks noGrp="1"/>
-          </p:cNvSpPr>
-          <p:nvPr>
-            <p:ph type="subTitle" idx="1"/>
-          </p:nvPr>
-        </p:nvSpPr>
-        <p:spPr/>
-        <p:txBody>
-          <a:bodyPr/>
-          <a:lstStyle/>
-          <a:p>
-            <a:endParaRPr lang="hu-HU"/>
-          </a:p>
-        </p:txBody>
-      </p:sp>
-      <p:pic>
-        <p:nvPicPr>
-          <p:cNvPr id="5" name="Kép 4">
-            <a:extLst>
-              <a:ext uri="{FF2B5EF4-FFF2-40B4-BE49-F238E27FC236}">
-                <a16:creationId xmlns:a16="http://schemas.microsoft.com/office/drawing/2014/main" id="{18E80F12-DE83-4CAC-99EE-483E94467085}"/>
-              </a:ext>
-            </a:extLst>
-          </p:cNvPr>
-          <p:cNvPicPr>
-            <a:picLocks noChangeAspect="1"/>
-          </p:cNvPicPr>
-          <p:nvPr/>
-        </p:nvPicPr>
-        <p:blipFill>
-          <a:blip r:embed="rId2"/>
-          <a:stretch>
-            <a:fillRect/>
-          </a:stretch>
-        </p:blipFill>
-        <p:spPr>
-          <a:xfrm>
-            <a:off x="-37052" y="-1"/>
-            <a:ext cx="12192000" cy="6858000"/>
-          </a:xfrm>
-          <a:prstGeom prst="rect">
-            <a:avLst/>
-          </a:prstGeom>
-        </p:spPr>
-      </p:pic>
-      <p:pic>
-        <p:nvPicPr>
-          <p:cNvPr id="7" name="Kép 6">
-            <a:extLst>
-              <a:ext uri="{FF2B5EF4-FFF2-40B4-BE49-F238E27FC236}">
-                <a16:creationId xmlns:a16="http://schemas.microsoft.com/office/drawing/2014/main" id="{B4693484-7845-3F92-C2F7-BF66F3373BAC}"/>
-              </a:ext>
-            </a:extLst>
-          </p:cNvPr>
-          <p:cNvPicPr>
-            <a:picLocks noChangeAspect="1"/>
-          </p:cNvPicPr>
-          <p:nvPr/>
-        </p:nvPicPr>
-        <p:blipFill>
-          <a:blip r:embed="rId3">
-            <a:extLst>
-              <a:ext uri="{28A0092B-C50C-407E-A947-70E740481C1C}">
-                <a14:useLocalDpi xmlns:a14="http://schemas.microsoft.com/office/drawing/2010/main" val="0"/>
-              </a:ext>
-            </a:extLst>
-          </a:blip>
-          <a:stretch>
-            <a:fillRect/>
-          </a:stretch>
-        </p:blipFill>
-        <p:spPr>
-          <a:xfrm>
-            <a:off x="2799813" y="2151647"/>
-            <a:ext cx="2810312" cy="2810312"/>
-          </a:xfrm>
-          <a:prstGeom prst="rect">
-            <a:avLst/>
-          </a:prstGeom>
-        </p:spPr>
-      </p:pic>
-      <p:sp>
-        <p:nvSpPr>
-          <p:cNvPr id="8" name="Szövegdoboz 7">
-            <a:extLst>
-              <a:ext uri="{FF2B5EF4-FFF2-40B4-BE49-F238E27FC236}">
-                <a16:creationId xmlns:a16="http://schemas.microsoft.com/office/drawing/2014/main" id="{07A0D04E-3CB7-2CA8-E811-6A78314B29A2}"/>
-              </a:ext>
-            </a:extLst>
-          </p:cNvPr>
-          <p:cNvSpPr txBox="1"/>
-          <p:nvPr/>
-        </p:nvSpPr>
-        <p:spPr>
-          <a:xfrm>
-            <a:off x="5488469" y="3059348"/>
-            <a:ext cx="6740583" cy="1384995"/>
-          </a:xfrm>
-          <a:prstGeom prst="rect">
-            <a:avLst/>
-          </a:prstGeom>
-          <a:noFill/>
-        </p:spPr>
-        <p:txBody>
-          <a:bodyPr wrap="square" rtlCol="0">
-            <a:spAutoFit/>
-          </a:bodyPr>
-          <a:lstStyle/>
-          <a:p>
-            <a:r>
-              <a:rPr lang="hu-HU" sz="6600" b="1" dirty="0" err="1">
-                <a:solidFill>
-                  <a:srgbClr val="FFFFFF"/>
-                </a:solidFill>
-                <a:effectLst/>
-                <a:latin typeface="system-ui"/>
-              </a:rPr>
-              <a:t>Tradely</a:t>
-            </a:r>
-            <a:endParaRPr lang="hu-HU" b="1" dirty="0">
-              <a:solidFill>
-                <a:srgbClr val="FFFFFF"/>
-              </a:solidFill>
-              <a:effectLst/>
-              <a:latin typeface="system-ui"/>
-            </a:endParaRPr>
-          </a:p>
-          <a:p>
-            <a:endParaRPr lang="hu-HU" dirty="0"/>
-          </a:p>
-        </p:txBody>
-      </p:sp>
-    </p:spTree>
-    <p:extLst>
-      <p:ext uri="{BB962C8B-B14F-4D97-AF65-F5344CB8AC3E}">
-        <p14:creationId xmlns:p14="http://schemas.microsoft.com/office/powerpoint/2010/main" val="1471465044"/>
       </p:ext>
     </p:extLst>
   </p:cSld>
